--- a/Topic_E/Exam_Practice/TE-L02_Speaking_Workshop_Multilingual_Life_and_Communication.pptx
+++ b/Topic_E/Exam_Practice/TE-L02_Speaking_Workshop_Multilingual_Life_and_Communication.pptx
@@ -615,7 +615,11 @@
           <a:lstStyle/>
           <a:p>
             <a:r>
-              <a:rPr lang="en-US" dirty="0"/>
+              <a:rPr lang="ar-SA" dirty="0">
+                <a:latin typeface="Amiri" pitchFamily="2" charset="-78"/>
+                <a:ea typeface="Amiri" pitchFamily="2" charset="-78"/>
+                <a:cs typeface="Amiri" pitchFamily="2" charset="-78"/>
+              </a:rPr>
               <a:t>ROLE PLAY C (Develop) — a school assembly.
 SET-UP IN THE BREAKOUT ROOM: A = examiner (reads the left column ONLY — the questions, in order), B = candidate (sees the task column; Core may use the help column), C = observer (ticks the feedback checklist). 1 minute preparation, about 3 minutes speaking, 1 minute feedback, then rotate.
 Task ! is the unexpected question: in the exam the candidate has not seen it — the examiner should read it without warning.
@@ -707,7 +711,11 @@
           <a:lstStyle/>
           <a:p>
             <a:r>
-              <a:rPr lang="en-US" dirty="0"/>
+              <a:rPr lang="ar-SA" dirty="0">
+                <a:latin typeface="Amiri" pitchFamily="2" charset="-78"/>
+                <a:ea typeface="Amiri" pitchFamily="2" charset="-78"/>
+                <a:cs typeface="Amiri" pitchFamily="2" charset="-78"/>
+              </a:rPr>
               <a:t>ROLE PLAY D (Stretch) — a formal interview.
 SET-UP IN THE BREAKOUT ROOM: A = examiner (reads the left column ONLY — the questions, in order), B = candidate (sees the task column; Core may use the help column), C = observer (ticks the feedback checklist). 1 minute preparation, about 3 minutes speaking, 1 minute feedback, then rotate.
 Task ! is the unexpected question: in the exam the candidate has not seen it — the examiner should read it without warning.
@@ -1243,7 +1251,11 @@
           <a:lstStyle/>
           <a:p>
             <a:r>
-              <a:rPr lang="en-US" dirty="0"/>
+              <a:rPr lang="ar-SA" dirty="0">
+                <a:latin typeface="Amiri" pitchFamily="2" charset="-78"/>
+                <a:ea typeface="Amiri" pitchFamily="2" charset="-78"/>
+                <a:cs typeface="Amiri" pitchFamily="2" charset="-78"/>
+              </a:rPr>
               <a:t>TOPIC CONVERSATION — Core. Examiner asks the questions in order and may add “لِمَاذَا؟ / هَلْ يُمْكِنُ أَنْ تَشْرَحَ أَكْثَرَ؟” to push for more. Candidate aims for one full sentence per question.
 </a:t>
             </a:r>
@@ -1332,7 +1344,11 @@
           <a:lstStyle/>
           <a:p>
             <a:r>
-              <a:rPr lang="en-US" dirty="0"/>
+              <a:rPr lang="ar-SA" dirty="0">
+                <a:latin typeface="Amiri" pitchFamily="2" charset="-78"/>
+                <a:ea typeface="Amiri" pitchFamily="2" charset="-78"/>
+                <a:cs typeface="Amiri" pitchFamily="2" charset="-78"/>
+              </a:rPr>
               <a:t>TOPIC CONVERSATION — Develop. Examiner asks the questions in order and may add “لِمَاذَا؟ / هَلْ يُمْكِنُ أَنْ تَشْرَحَ أَكْثَرَ؟” to push for more. Candidate aims for two or three sentences, with a verbal noun or a relative clause.
 </a:t>
             </a:r>
@@ -1421,7 +1437,11 @@
           <a:lstStyle/>
           <a:p>
             <a:r>
-              <a:rPr lang="en-US" dirty="0"/>
+              <a:rPr lang="ar-SA" dirty="0">
+                <a:latin typeface="Amiri" pitchFamily="2" charset="-78"/>
+                <a:ea typeface="Amiri" pitchFamily="2" charset="-78"/>
+                <a:cs typeface="Amiri" pitchFamily="2" charset="-78"/>
+              </a:rPr>
               <a:t>TOPIC CONVERSATION — Stretch. Examiner asks the questions in order and may add “لِمَاذَا؟ / هَلْ يُمْكِنُ أَنْ تَشْرَحَ أَكْثَرَ؟” to push for more. Candidate aims for a developed answer: opinion, balance, concession and a conditional.
 </a:t>
             </a:r>
@@ -1510,7 +1530,11 @@
           <a:lstStyle/>
           <a:p>
             <a:r>
-              <a:rPr lang="en-US" dirty="0"/>
+              <a:rPr lang="ar-SA" dirty="0">
+                <a:latin typeface="Amiri" pitchFamily="2" charset="-78"/>
+                <a:ea typeface="Amiri" pitchFamily="2" charset="-78"/>
+                <a:cs typeface="Amiri" pitchFamily="2" charset="-78"/>
+              </a:rPr>
               <a:t>WELCOME (1 min) — while students join.
 • Greet each student by name as they arrive: السَّلَامُ عَلَيْكُمْ. Take the register (Pastoral Tracker: attendance 0/1).
 • 2-MINUTE CHECK-IN (SEND training): a private chat to any student who seemed unsettled last lesson — “Are you okay today? 👍 / 👎”.
@@ -2224,7 +2248,11 @@
           <a:lstStyle/>
           <a:p>
             <a:r>
-              <a:rPr lang="en-US" dirty="0"/>
+              <a:rPr lang="ar-SA" dirty="0">
+                <a:latin typeface="Amiri" pitchFamily="2" charset="-78"/>
+                <a:ea typeface="Amiri" pitchFamily="2" charset="-78"/>
+                <a:cs typeface="Amiri" pitchFamily="2" charset="-78"/>
+              </a:rPr>
               <a:t>TEACH (3 min). Role play = precise and complete; conversation = develop. Choral repetition of the repair phrases. To a girl: تُعِيدِي.</a:t>
             </a:r>
             <a:endParaRPr lang="en-US" dirty="0"/>
@@ -2312,7 +2340,11 @@
           <a:lstStyle/>
           <a:p>
             <a:r>
-              <a:rPr lang="en-US" dirty="0"/>
+              <a:rPr lang="ar-SA" dirty="0">
+                <a:latin typeface="Amiri" pitchFamily="2" charset="-78"/>
+                <a:ea typeface="Amiri" pitchFamily="2" charset="-78"/>
+                <a:cs typeface="Amiri" pitchFamily="2" charset="-78"/>
+              </a:rPr>
               <a:t>LANGUAGE BANK (2 min) — the maṣdar lets you talk ABOUT an activity: أَتَعَلَّمُ → تَعَلُّمٌ · أَتَوَاصَلُ → تَوَاصُلٌ · أُتَرْجِمُ → تَرْجَمَةٌ. Use it as a subject (تَعَلُّمُ اللُّغَاتِ مُفِيدٌ) or after أُحِبُّ (أُحِبُّ التَّرْجَمَةَ).</a:t>
             </a:r>
             <a:endParaRPr lang="en-US" dirty="0"/>
@@ -2400,7 +2432,11 @@
           <a:lstStyle/>
           <a:p>
             <a:r>
-              <a:rPr lang="en-US" dirty="0"/>
+              <a:rPr lang="ar-SA" dirty="0">
+                <a:latin typeface="Amiri" pitchFamily="2" charset="-78"/>
+                <a:ea typeface="Amiri" pitchFamily="2" charset="-78"/>
+                <a:cs typeface="Amiri" pitchFamily="2" charset="-78"/>
+              </a:rPr>
               <a:t>LANGUAGE BANK (2 min) — الَّذِي for m. nouns, الَّتِي for f. nouns AND non-human plurals (اللُّغَاتُ الَّتِي أَتَكَلَّمُهَا), الَّذِينَ for people (pl.). Remember the returning pronoun: الصَّدِيقُ الَّذِي أُرَاسِلُهُ.</a:t>
             </a:r>
             <a:endParaRPr lang="en-US" dirty="0"/>
@@ -2576,7 +2612,11 @@
           <a:lstStyle/>
           <a:p>
             <a:r>
-              <a:rPr lang="en-US" dirty="0"/>
+              <a:rPr lang="ar-SA" dirty="0">
+                <a:latin typeface="Amiri" pitchFamily="2" charset="-78"/>
+                <a:ea typeface="Amiri" pitchFamily="2" charset="-78"/>
+                <a:cs typeface="Amiri" pitchFamily="2" charset="-78"/>
+              </a:rPr>
               <a:t>ROLE PLAY A (Core) — a language-school open day.
 SET-UP IN THE BREAKOUT ROOM: A = examiner (reads the left column ONLY — the questions, in order), B = candidate (sees the task column; Core may use the help column), C = observer (ticks the feedback checklist). 1 minute preparation, about 3 minutes speaking, 1 minute feedback, then rotate.
 Task ! is the unexpected question: in the exam the candidate has not seen it — the examiner should read it without warning.
@@ -2668,7 +2708,11 @@
           <a:lstStyle/>
           <a:p>
             <a:r>
-              <a:rPr lang="en-US" dirty="0"/>
+              <a:rPr lang="ar-SA" dirty="0">
+                <a:latin typeface="Amiri" pitchFamily="2" charset="-78"/>
+                <a:ea typeface="Amiri" pitchFamily="2" charset="-78"/>
+                <a:cs typeface="Amiri" pitchFamily="2" charset="-78"/>
+              </a:rPr>
               <a:t>ROLE PLAY B (Core+) — a railway station.
 SET-UP IN THE BREAKOUT ROOM: A = examiner (reads the left column ONLY — the questions, in order), B = candidate (sees the task column; Core may use the help column), C = observer (ticks the feedback checklist). 1 minute preparation, about 3 minutes speaking, 1 minute feedback, then rotate.
 Task ! is the unexpected question: in the exam the candidate has not seen it — the examiner should read it without warning.
@@ -3156,6 +3200,7 @@
                   <a:srgbClr val="D4AF37"/>
                 </a:solidFill>
                 <a:latin typeface="Amiri" pitchFamily="2" charset="-78"/>
+                <a:ea typeface="Amiri" pitchFamily="2" charset="-78"/>
                 <a:cs typeface="Amiri" pitchFamily="2" charset="-78"/>
               </a:rPr>
               <a:t>م</a:t>
@@ -3362,6 +3407,7 @@
                   <a:srgbClr val="D4AF37"/>
                 </a:solidFill>
                 <a:latin typeface="Amiri" pitchFamily="2" charset="-78"/>
+                <a:ea typeface="Amiri" pitchFamily="2" charset="-78"/>
                 <a:cs typeface="Amiri" pitchFamily="2" charset="-78"/>
               </a:rPr>
               <a:t>وَرْشَةُ التَّحَدُّثِ — الحَيَاةُ بِلُغَاتٍ مُتَعَدِّدَةٍ</a:t>
@@ -3413,6 +3459,7 @@
                   <a:srgbClr val="C6D2E6"/>
                 </a:solidFill>
                 <a:latin typeface="Amiri" pitchFamily="2" charset="-78"/>
+                <a:ea typeface="Amiri" pitchFamily="2" charset="-78"/>
                 <a:cs typeface="Amiri" pitchFamily="2" charset="-78"/>
               </a:rPr>
               <a:t>تَعَلُّمٌ</a:t>
@@ -3439,6 +3486,7 @@
                   <a:srgbClr val="C6D2E6"/>
                 </a:solidFill>
                 <a:latin typeface="Amiri" pitchFamily="2" charset="-78"/>
+                <a:ea typeface="Amiri" pitchFamily="2" charset="-78"/>
                 <a:cs typeface="Amiri" pitchFamily="2" charset="-78"/>
               </a:rPr>
               <a:t>تَوَاصُلٌ</a:t>
@@ -3465,6 +3513,7 @@
                   <a:srgbClr val="C6D2E6"/>
                 </a:solidFill>
                 <a:latin typeface="Amiri" pitchFamily="2" charset="-78"/>
+                <a:ea typeface="Amiri" pitchFamily="2" charset="-78"/>
                 <a:cs typeface="Amiri" pitchFamily="2" charset="-78"/>
               </a:rPr>
               <a:t>تَرْجَمَةٌ</a:t>
@@ -3491,6 +3540,7 @@
                   <a:srgbClr val="C6D2E6"/>
                 </a:solidFill>
                 <a:latin typeface="Amiri" pitchFamily="2" charset="-78"/>
+                <a:ea typeface="Amiri" pitchFamily="2" charset="-78"/>
                 <a:cs typeface="Amiri" pitchFamily="2" charset="-78"/>
               </a:rPr>
               <a:t>الَّذِي</a:t>
@@ -3517,6 +3567,7 @@
                   <a:srgbClr val="C6D2E6"/>
                 </a:solidFill>
                 <a:latin typeface="Amiri" pitchFamily="2" charset="-78"/>
+                <a:ea typeface="Amiri" pitchFamily="2" charset="-78"/>
                 <a:cs typeface="Amiri" pitchFamily="2" charset="-78"/>
               </a:rPr>
               <a:t>الَّتِي</a:t>
@@ -3543,6 +3594,7 @@
                   <a:srgbClr val="C6D2E6"/>
                 </a:solidFill>
                 <a:latin typeface="Amiri" pitchFamily="2" charset="-78"/>
+                <a:ea typeface="Amiri" pitchFamily="2" charset="-78"/>
                 <a:cs typeface="Amiri" pitchFamily="2" charset="-78"/>
               </a:rPr>
               <a:t>مَنْ</a:t>
@@ -3975,6 +4027,7 @@
                   <a:srgbClr val="D4AF37"/>
                 </a:solidFill>
                 <a:latin typeface="Amiri" pitchFamily="2" charset="-78"/>
+                <a:ea typeface="Amiri" pitchFamily="2" charset="-78"/>
                 <a:cs typeface="Amiri" pitchFamily="2" charset="-78"/>
               </a:rPr>
               <a:t>م</a:t>
@@ -4295,6 +4348,7 @@
                   <a:srgbClr val="8A6D1E"/>
                 </a:solidFill>
                 <a:latin typeface="Amiri" pitchFamily="2" charset="-78"/>
+                <a:ea typeface="Amiri" pitchFamily="2" charset="-78"/>
                 <a:cs typeface="Amiri" pitchFamily="2" charset="-78"/>
               </a:rPr>
               <a:t>سَفِيرُ اللُّغَاتِ فِي المَدْرَسَةِ</a:t>
@@ -4575,6 +4629,7 @@
                   <a:srgbClr val="1B3B6F"/>
                 </a:solidFill>
                 <a:latin typeface="Amiri" pitchFamily="2" charset="-78"/>
+                <a:ea typeface="Amiri" pitchFamily="2" charset="-78"/>
                 <a:cs typeface="Amiri" pitchFamily="2" charset="-78"/>
               </a:rPr>
               <a:t>فِي الصَّبَاحِ … وَفِي المَدْرَسَةِ … وَفِي المَسَاءِ …</a:t>
@@ -4651,6 +4706,7 @@
                   <a:srgbClr val="1B3B6F"/>
                 </a:solidFill>
                 <a:latin typeface="Amiri" pitchFamily="2" charset="-78"/>
+                <a:ea typeface="Amiri" pitchFamily="2" charset="-78"/>
                 <a:cs typeface="Amiri" pitchFamily="2" charset="-78"/>
               </a:rPr>
               <a:t>كَمْ لُغَةً تَسْتَخْدِمُ فِي يَوْمٍ عَادِيٍّ؟</a:t>
@@ -4754,6 +4810,7 @@
                   <a:srgbClr val="1B3B6F"/>
                 </a:solidFill>
                 <a:latin typeface="Amiri" pitchFamily="2" charset="-78"/>
+                <a:ea typeface="Amiri" pitchFamily="2" charset="-78"/>
                 <a:cs typeface="Amiri" pitchFamily="2" charset="-78"/>
               </a:rPr>
               <a:t>الطَّرِيقَةُ الَّتِي … هِيَ …</a:t>
@@ -4830,6 +4887,7 @@
                   <a:srgbClr val="1B3B6F"/>
                 </a:solidFill>
                 <a:latin typeface="Amiri" pitchFamily="2" charset="-78"/>
+                <a:ea typeface="Amiri" pitchFamily="2" charset="-78"/>
                 <a:cs typeface="Amiri" pitchFamily="2" charset="-78"/>
               </a:rPr>
               <a:t>مَا الطَّرِيقَةُ الَّتِي تُسَاعِدُكَ أَكْثَرَ؟</a:t>
@@ -4933,6 +4991,7 @@
                   <a:srgbClr val="1B3B6F"/>
                 </a:solidFill>
                 <a:latin typeface="Amiri" pitchFamily="2" charset="-78"/>
+                <a:ea typeface="Amiri" pitchFamily="2" charset="-78"/>
                 <a:cs typeface="Amiri" pitchFamily="2" charset="-78"/>
               </a:rPr>
               <a:t>نَتَّصِلُ … كُلَّ … وَأُرْسِلُ …</a:t>
@@ -5009,6 +5068,7 @@
                   <a:srgbClr val="1B3B6F"/>
                 </a:solidFill>
                 <a:latin typeface="Amiri" pitchFamily="2" charset="-78"/>
+                <a:ea typeface="Amiri" pitchFamily="2" charset="-78"/>
                 <a:cs typeface="Amiri" pitchFamily="2" charset="-78"/>
               </a:rPr>
               <a:t>كَيْفَ تَتَوَاصَلُ مَعَ أَقَارِبِكَ فِي الخَارِجِ؟</a:t>
@@ -5112,6 +5172,7 @@
                   <a:srgbClr val="1B3B6F"/>
                 </a:solidFill>
                 <a:latin typeface="Amiri" pitchFamily="2" charset="-78"/>
+                <a:ea typeface="Amiri" pitchFamily="2" charset="-78"/>
                 <a:cs typeface="Amiri" pitchFamily="2" charset="-78"/>
               </a:rPr>
               <a:t>أَصْعَبُ شَيْءٍ … لِذٰلِكَ …</a:t>
@@ -5188,6 +5249,7 @@
                   <a:srgbClr val="1B3B6F"/>
                 </a:solidFill>
                 <a:latin typeface="Amiri" pitchFamily="2" charset="-78"/>
+                <a:ea typeface="Amiri" pitchFamily="2" charset="-78"/>
                 <a:cs typeface="Amiri" pitchFamily="2" charset="-78"/>
               </a:rPr>
               <a:t>مَا أَصْعَبُ شَيْءٍ؟</a:t>
@@ -5291,6 +5353,7 @@
                   <a:srgbClr val="1B3B6F"/>
                 </a:solidFill>
                 <a:latin typeface="Amiri" pitchFamily="2" charset="-78"/>
+                <a:ea typeface="Amiri" pitchFamily="2" charset="-78"/>
                 <a:cs typeface="Amiri" pitchFamily="2" charset="-78"/>
               </a:rPr>
               <a:t>نَعَمْ، مَرَّةً طَلَبْتُ … فَأَحْضَرَ …</a:t>
@@ -5367,6 +5430,7 @@
                   <a:srgbClr val="1B3B6F"/>
                 </a:solidFill>
                 <a:latin typeface="Amiri" pitchFamily="2" charset="-78"/>
+                <a:ea typeface="Amiri" pitchFamily="2" charset="-78"/>
                 <a:cs typeface="Amiri" pitchFamily="2" charset="-78"/>
               </a:rPr>
               <a:t>هَلْ حَدَثَ مَعَكَ سُوءُ فَهْمٍ مُضْحِكٌ؟</a:t>
@@ -5576,6 +5640,7 @@
                   <a:srgbClr val="D4AF37"/>
                 </a:solidFill>
                 <a:latin typeface="Amiri" pitchFamily="2" charset="-78"/>
+                <a:ea typeface="Amiri" pitchFamily="2" charset="-78"/>
                 <a:cs typeface="Amiri" pitchFamily="2" charset="-78"/>
               </a:rPr>
               <a:t>م</a:t>
@@ -5896,6 +5961,7 @@
                   <a:srgbClr val="8A6D1E"/>
                 </a:solidFill>
                 <a:latin typeface="Amiri" pitchFamily="2" charset="-78"/>
+                <a:ea typeface="Amiri" pitchFamily="2" charset="-78"/>
                 <a:cs typeface="Amiri" pitchFamily="2" charset="-78"/>
               </a:rPr>
               <a:t>مُتَرْجِمٌ مُتَطَوِّعٌ</a:t>
@@ -6176,6 +6242,7 @@
                   <a:srgbClr val="1B3B6F"/>
                 </a:solidFill>
                 <a:latin typeface="Amiri" pitchFamily="2" charset="-78"/>
+                <a:ea typeface="Amiri" pitchFamily="2" charset="-78"/>
                 <a:cs typeface="Amiri" pitchFamily="2" charset="-78"/>
               </a:rPr>
               <a:t>يَسُرُّنِي أَنْ … فَقَدْ رَأَيْتُ …</a:t>
@@ -6252,6 +6319,7 @@
                   <a:srgbClr val="1B3B6F"/>
                 </a:solidFill>
                 <a:latin typeface="Amiri" pitchFamily="2" charset="-78"/>
+                <a:ea typeface="Amiri" pitchFamily="2" charset="-78"/>
                 <a:cs typeface="Amiri" pitchFamily="2" charset="-78"/>
               </a:rPr>
               <a:t>لِمَاذَا تُرِيدُ أَنْ تَتَطَوَّعَ مُتَرْجِمًا؟</a:t>
@@ -6355,6 +6423,7 @@
                   <a:srgbClr val="1B3B6F"/>
                 </a:solidFill>
                 <a:latin typeface="Amiri" pitchFamily="2" charset="-78"/>
+                <a:ea typeface="Amiri" pitchFamily="2" charset="-78"/>
                 <a:cs typeface="Amiri" pitchFamily="2" charset="-78"/>
               </a:rPr>
               <a:t>أَوَّلًا … بِالإِضَافَةِ إِلَى ذٰلِكَ …</a:t>
@@ -6431,6 +6500,7 @@
                   <a:srgbClr val="1B3B6F"/>
                 </a:solidFill>
                 <a:latin typeface="Amiri" pitchFamily="2" charset="-78"/>
+                <a:ea typeface="Amiri" pitchFamily="2" charset="-78"/>
                 <a:cs typeface="Amiri" pitchFamily="2" charset="-78"/>
               </a:rPr>
               <a:t>مَا المَهَارَاتُ الَّتِي يَحْتَاجُ إِلَيْهَا المُتَرْجِمُ؟</a:t>
@@ -6534,6 +6604,7 @@
                   <a:srgbClr val="1B3B6F"/>
                 </a:solidFill>
                 <a:latin typeface="Amiri" pitchFamily="2" charset="-78"/>
+                <a:ea typeface="Amiri" pitchFamily="2" charset="-78"/>
                 <a:cs typeface="Amiri" pitchFamily="2" charset="-78"/>
               </a:rPr>
               <a:t>نَعَمْ، أُتَرْجِمُ لِوَالِدَتِي عِنْدَمَا … مِمَّا …</a:t>
@@ -6610,6 +6681,7 @@
                   <a:srgbClr val="1B3B6F"/>
                 </a:solidFill>
                 <a:latin typeface="Amiri" pitchFamily="2" charset="-78"/>
+                <a:ea typeface="Amiri" pitchFamily="2" charset="-78"/>
                 <a:cs typeface="Amiri" pitchFamily="2" charset="-78"/>
               </a:rPr>
               <a:t>هَلْ تُتَرْجِمُ لِأَحَدٍ الآنَ؟</a:t>
@@ -6713,6 +6785,7 @@
                   <a:srgbClr val="1B3B6F"/>
                 </a:solidFill>
                 <a:latin typeface="Amiri" pitchFamily="2" charset="-78"/>
+                <a:ea typeface="Amiri" pitchFamily="2" charset="-78"/>
                 <a:cs typeface="Amiri" pitchFamily="2" charset="-78"/>
               </a:rPr>
               <a:t>صَحِيحٌ أَنَّ … غَيْرَ أَنَّ …</a:t>
@@ -6789,6 +6862,7 @@
                   <a:srgbClr val="1B3B6F"/>
                 </a:solidFill>
                 <a:latin typeface="Amiri" pitchFamily="2" charset="-78"/>
+                <a:ea typeface="Amiri" pitchFamily="2" charset="-78"/>
                 <a:cs typeface="Amiri" pitchFamily="2" charset="-78"/>
               </a:rPr>
               <a:t>أَلَيْسَتِ التَّرْجَمَةُ الآلِيَّةُ كَافِيَةً اليَوْمَ؟</a:t>
@@ -6892,6 +6966,7 @@
                   <a:srgbClr val="1B3B6F"/>
                 </a:solidFill>
                 <a:latin typeface="Amiri" pitchFamily="2" charset="-78"/>
+                <a:ea typeface="Amiri" pitchFamily="2" charset="-78"/>
                 <a:cs typeface="Amiri" pitchFamily="2" charset="-78"/>
               </a:rPr>
               <a:t>لَوْ طَلَبَ …، لَشَرَحْتُ …</a:t>
@@ -6968,6 +7043,7 @@
                   <a:srgbClr val="1B3B6F"/>
                 </a:solidFill>
                 <a:latin typeface="Amiri" pitchFamily="2" charset="-78"/>
+                <a:ea typeface="Amiri" pitchFamily="2" charset="-78"/>
                 <a:cs typeface="Amiri" pitchFamily="2" charset="-78"/>
               </a:rPr>
               <a:t>لَوْ طَلَبَ مِنْكَ شَخْصٌ أَنْ تُغَيِّرَ كَلَامَهُ، مَاذَا تَفْعَلُ؟</a:t>
@@ -7177,6 +7253,7 @@
                   <a:srgbClr val="D4AF37"/>
                 </a:solidFill>
                 <a:latin typeface="Amiri" pitchFamily="2" charset="-78"/>
+                <a:ea typeface="Amiri" pitchFamily="2" charset="-78"/>
                 <a:cs typeface="Amiri" pitchFamily="2" charset="-78"/>
               </a:rPr>
               <a:t>م</a:t>
@@ -7497,6 +7574,7 @@
                   <a:srgbClr val="8A6D1E"/>
                 </a:solidFill>
                 <a:latin typeface="Amiri" pitchFamily="2" charset="-78"/>
+                <a:ea typeface="Amiri" pitchFamily="2" charset="-78"/>
                 <a:cs typeface="Amiri" pitchFamily="2" charset="-78"/>
               </a:rPr>
               <a:t>وَرَقَةُ المُلَاحِظِ</a:t>
@@ -8967,6 +9045,7 @@
                   <a:srgbClr val="D4AF37"/>
                 </a:solidFill>
                 <a:latin typeface="Amiri" pitchFamily="2" charset="-78"/>
+                <a:ea typeface="Amiri" pitchFamily="2" charset="-78"/>
                 <a:cs typeface="Amiri" pitchFamily="2" charset="-78"/>
               </a:rPr>
               <a:t>م</a:t>
@@ -9287,6 +9366,7 @@
                   <a:srgbClr val="8A6D1E"/>
                 </a:solidFill>
                 <a:latin typeface="Amiri" pitchFamily="2" charset="-78"/>
+                <a:ea typeface="Amiri" pitchFamily="2" charset="-78"/>
                 <a:cs typeface="Amiri" pitchFamily="2" charset="-78"/>
               </a:rPr>
               <a:t>نَمُوذَجُ الإِجَابَةِ</a:t>
@@ -9529,6 +9609,7 @@
                   <a:srgbClr val="1B3B6F"/>
                 </a:solidFill>
                 <a:latin typeface="Amiri" pitchFamily="2" charset="-78"/>
+                <a:ea typeface="Amiri" pitchFamily="2" charset="-78"/>
                 <a:cs typeface="Amiri" pitchFamily="2" charset="-78"/>
               </a:rPr>
               <a:t>أَتَعَلَّمُ اللُّغَةَ العَرَبِيَّةَ.</a:t>
@@ -9605,6 +9686,7 @@
                   <a:srgbClr val="1B3B6F"/>
                 </a:solidFill>
                 <a:latin typeface="Amiri" pitchFamily="2" charset="-78"/>
+                <a:ea typeface="Amiri" pitchFamily="2" charset="-78"/>
                 <a:cs typeface="Amiri" pitchFamily="2" charset="-78"/>
               </a:rPr>
               <a:t>أَهْلًا! أَيَّ لُغَةٍ تَتَعَلَّمُ؟</a:t>
@@ -9708,6 +9790,7 @@
                   <a:srgbClr val="1B3B6F"/>
                 </a:solidFill>
                 <a:latin typeface="Amiri" pitchFamily="2" charset="-78"/>
+                <a:ea typeface="Amiri" pitchFamily="2" charset="-78"/>
                 <a:cs typeface="Amiri" pitchFamily="2" charset="-78"/>
               </a:rPr>
               <a:t>أَتَعَلَّمُهَا مُنْذُ ثَلَاثِ سَنَوَاتٍ.</a:t>
@@ -9784,6 +9867,7 @@
                   <a:srgbClr val="1B3B6F"/>
                 </a:solidFill>
                 <a:latin typeface="Amiri" pitchFamily="2" charset="-78"/>
+                <a:ea typeface="Amiri" pitchFamily="2" charset="-78"/>
                 <a:cs typeface="Amiri" pitchFamily="2" charset="-78"/>
               </a:rPr>
               <a:t>مُنْذُ مَتَى؟</a:t>
@@ -9887,6 +9971,7 @@
                   <a:srgbClr val="1B3B6F"/>
                 </a:solidFill>
                 <a:latin typeface="Amiri" pitchFamily="2" charset="-78"/>
+                <a:ea typeface="Amiri" pitchFamily="2" charset="-78"/>
                 <a:cs typeface="Amiri" pitchFamily="2" charset="-78"/>
               </a:rPr>
               <a:t>لِأَنَّ أُسْرَتِي تَتَكَلَّمُ العَرَبِيَّةَ.</a:t>
@@ -9963,6 +10048,7 @@
                   <a:srgbClr val="1B3B6F"/>
                 </a:solidFill>
                 <a:latin typeface="Amiri" pitchFamily="2" charset="-78"/>
+                <a:ea typeface="Amiri" pitchFamily="2" charset="-78"/>
                 <a:cs typeface="Amiri" pitchFamily="2" charset="-78"/>
               </a:rPr>
               <a:t>وَلِمَاذَا تَتَعَلَّمُهَا؟</a:t>
@@ -10066,6 +10152,7 @@
                   <a:srgbClr val="1B3B6F"/>
                 </a:solidFill>
                 <a:latin typeface="Amiri" pitchFamily="2" charset="-78"/>
+                <a:ea typeface="Amiri" pitchFamily="2" charset="-78"/>
                 <a:cs typeface="Amiri" pitchFamily="2" charset="-78"/>
               </a:rPr>
               <a:t>مَتَى الصُّفُوفُ، مِنْ فَضْلِكَ؟</a:t>
@@ -10142,6 +10229,7 @@
                   <a:srgbClr val="1B3B6F"/>
                 </a:solidFill>
                 <a:latin typeface="Amiri" pitchFamily="2" charset="-78"/>
+                <a:ea typeface="Amiri" pitchFamily="2" charset="-78"/>
                 <a:cs typeface="Amiri" pitchFamily="2" charset="-78"/>
               </a:rPr>
               <a:t>عِنْدَنَا صُفُوفٌ لِلْمُحَادَثَةِ.</a:t>
@@ -10245,6 +10333,7 @@
                   <a:srgbClr val="1B3B6F"/>
                 </a:solidFill>
                 <a:latin typeface="Amiri" pitchFamily="2" charset="-78"/>
+                <a:ea typeface="Amiri" pitchFamily="2" charset="-78"/>
                 <a:cs typeface="Amiri" pitchFamily="2" charset="-78"/>
               </a:rPr>
               <a:t>أَسْتَخْدِمُ تَطْبِيقًا، وَأُشَاهِدُ أَفْلَامًا بِالعَرَبِيَّةِ.</a:t>
@@ -10321,6 +10410,7 @@
                   <a:srgbClr val="1B3B6F"/>
                 </a:solidFill>
                 <a:latin typeface="Amiri" pitchFamily="2" charset="-78"/>
+                <a:ea typeface="Amiri" pitchFamily="2" charset="-78"/>
                 <a:cs typeface="Amiri" pitchFamily="2" charset="-78"/>
               </a:rPr>
               <a:t>يَوْمَ الأَرْبِعَاءِ. كَيْفَ تَتَدَرَّبُ فِي البَيْتِ؟</a:t>
@@ -10530,6 +10620,7 @@
                   <a:srgbClr val="D4AF37"/>
                 </a:solidFill>
                 <a:latin typeface="Amiri" pitchFamily="2" charset="-78"/>
+                <a:ea typeface="Amiri" pitchFamily="2" charset="-78"/>
                 <a:cs typeface="Amiri" pitchFamily="2" charset="-78"/>
               </a:rPr>
               <a:t>م</a:t>
@@ -10850,6 +10941,7 @@
                   <a:srgbClr val="8A6D1E"/>
                 </a:solidFill>
                 <a:latin typeface="Amiri" pitchFamily="2" charset="-78"/>
+                <a:ea typeface="Amiri" pitchFamily="2" charset="-78"/>
                 <a:cs typeface="Amiri" pitchFamily="2" charset="-78"/>
               </a:rPr>
               <a:t>نَمُوذَجُ الإِجَابَةِ</a:t>
@@ -11092,6 +11184,7 @@
                   <a:srgbClr val="1B3B6F"/>
                 </a:solidFill>
                 <a:latin typeface="Amiri" pitchFamily="2" charset="-78"/>
+                <a:ea typeface="Amiri" pitchFamily="2" charset="-78"/>
                 <a:cs typeface="Amiri" pitchFamily="2" charset="-78"/>
               </a:rPr>
               <a:t>نَعَمْ، أَتَكَلَّمُ العَرَبِيَّةَ. كَيْفَ أُسَاعِدُكَ؟</a:t>
@@ -11168,6 +11261,7 @@
                   <a:srgbClr val="1B3B6F"/>
                 </a:solidFill>
                 <a:latin typeface="Amiri" pitchFamily="2" charset="-78"/>
+                <a:ea typeface="Amiri" pitchFamily="2" charset="-78"/>
                 <a:cs typeface="Amiri" pitchFamily="2" charset="-78"/>
               </a:rPr>
               <a:t>عَفْوًا، هَلْ تَتَكَلَّمُ العَرَبِيَّةَ؟</a:t>
@@ -11271,6 +11365,7 @@
                   <a:srgbClr val="1B3B6F"/>
                 </a:solidFill>
                 <a:latin typeface="Amiri" pitchFamily="2" charset="-78"/>
+                <a:ea typeface="Amiri" pitchFamily="2" charset="-78"/>
                 <a:cs typeface="Amiri" pitchFamily="2" charset="-78"/>
               </a:rPr>
               <a:t>القِطَارُ الَّذِي يَذْهَبُ إِلَى لَنْدَنَ يَنْطَلِقُ مِنَ الرَّصِيفِ الرَّابِعِ.</a:t>
@@ -11347,6 +11442,7 @@
                   <a:srgbClr val="1B3B6F"/>
                 </a:solidFill>
                 <a:latin typeface="Amiri" pitchFamily="2" charset="-78"/>
+                <a:ea typeface="Amiri" pitchFamily="2" charset="-78"/>
                 <a:cs typeface="Amiri" pitchFamily="2" charset="-78"/>
               </a:rPr>
               <a:t>أُرِيدُ القِطَارَ إِلَى لَنْدَنَ، لٰكِنِّي لَا أَفْهَمُ اللَّوْحَةَ.</a:t>
@@ -11450,6 +11546,7 @@
                   <a:srgbClr val="1B3B6F"/>
                 </a:solidFill>
                 <a:latin typeface="Amiri" pitchFamily="2" charset="-78"/>
+                <a:ea typeface="Amiri" pitchFamily="2" charset="-78"/>
                 <a:cs typeface="Amiri" pitchFamily="2" charset="-78"/>
               </a:rPr>
               <a:t>أَتَكَلَّمُهَا فِي البَيْتِ مَعَ أُسْرَتِي، وَأَدْرُسُ الفُصْحَى فِي المَدْرَسَةِ.</a:t>
@@ -11526,6 +11623,7 @@
                   <a:srgbClr val="1B3B6F"/>
                 </a:solidFill>
                 <a:latin typeface="Amiri" pitchFamily="2" charset="-78"/>
+                <a:ea typeface="Amiri" pitchFamily="2" charset="-78"/>
                 <a:cs typeface="Amiri" pitchFamily="2" charset="-78"/>
               </a:rPr>
               <a:t>شُكْرًا! أَيْنَ تَعَلَّمْتَ العَرَبِيَّةَ؟</a:t>
@@ -11629,6 +11727,7 @@
                   <a:srgbClr val="1B3B6F"/>
                 </a:solidFill>
                 <a:latin typeface="Amiri" pitchFamily="2" charset="-78"/>
+                <a:ea typeface="Amiri" pitchFamily="2" charset="-78"/>
                 <a:cs typeface="Amiri" pitchFamily="2" charset="-78"/>
               </a:rPr>
               <a:t>صَحِيحٌ! مِنْ أَيِّ بَلَدٍ أَنْتَ؟</a:t>
@@ -11705,6 +11804,7 @@
                   <a:srgbClr val="1B3B6F"/>
                 </a:solidFill>
                 <a:latin typeface="Amiri" pitchFamily="2" charset="-78"/>
+                <a:ea typeface="Amiri" pitchFamily="2" charset="-78"/>
                 <a:cs typeface="Amiri" pitchFamily="2" charset="-78"/>
               </a:rPr>
               <a:t>لَهْجَتُكَ مُخْتَلِفَةٌ عَنْ لَهْجَتِي!</a:t>
@@ -11808,6 +11908,7 @@
                   <a:srgbClr val="1B3B6F"/>
                 </a:solidFill>
                 <a:latin typeface="Amiri" pitchFamily="2" charset="-78"/>
+                <a:ea typeface="Amiri" pitchFamily="2" charset="-78"/>
                 <a:cs typeface="Amiri" pitchFamily="2" charset="-78"/>
               </a:rPr>
               <a:t>القِرَاءَةُ سَهْلَةٌ، أَمَّا الكِتَابَةُ فَصَعْبَةٌ قَلِيلًا، لِأَنَّ القَوَاعِدَ كَثِيرَةٌ.</a:t>
@@ -11884,6 +11985,7 @@
                   <a:srgbClr val="1B3B6F"/>
                 </a:solidFill>
                 <a:latin typeface="Amiri" pitchFamily="2" charset="-78"/>
+                <a:ea typeface="Amiri" pitchFamily="2" charset="-78"/>
                 <a:cs typeface="Amiri" pitchFamily="2" charset="-78"/>
               </a:rPr>
               <a:t>مِنَ العِرَاقِ. هَلِ العَرَبِيَّةُ صَعْبَةٌ عَلَيْكَ؟</a:t>
@@ -12093,6 +12195,7 @@
                   <a:srgbClr val="D4AF37"/>
                 </a:solidFill>
                 <a:latin typeface="Amiri" pitchFamily="2" charset="-78"/>
+                <a:ea typeface="Amiri" pitchFamily="2" charset="-78"/>
                 <a:cs typeface="Amiri" pitchFamily="2" charset="-78"/>
               </a:rPr>
               <a:t>م</a:t>
@@ -12413,6 +12516,7 @@
                   <a:srgbClr val="8A6D1E"/>
                 </a:solidFill>
                 <a:latin typeface="Amiri" pitchFamily="2" charset="-78"/>
+                <a:ea typeface="Amiri" pitchFamily="2" charset="-78"/>
                 <a:cs typeface="Amiri" pitchFamily="2" charset="-78"/>
               </a:rPr>
               <a:t>نَمُوذَجُ الإِجَابَةِ</a:t>
@@ -12655,6 +12759,7 @@
                   <a:srgbClr val="1B3B6F"/>
                 </a:solidFill>
                 <a:latin typeface="Amiri" pitchFamily="2" charset="-78"/>
+                <a:ea typeface="Amiri" pitchFamily="2" charset="-78"/>
                 <a:cs typeface="Amiri" pitchFamily="2" charset="-78"/>
               </a:rPr>
               <a:t>فِي الصَّبَاحِ أَتَكَلَّمُ البُنْجَابِيَّةَ مَعَ جَدَّتِي، وَفِي المَدْرَسَةِ الإِنْجْلِيزِيَّةَ، وَفِي المَسَاءِ أَدْرُسُ العَرَبِيَّةَ؛ أَيْ ثَلَاثَ لُغَاتٍ.</a:t>
@@ -12731,6 +12836,7 @@
                   <a:srgbClr val="1B3B6F"/>
                 </a:solidFill>
                 <a:latin typeface="Amiri" pitchFamily="2" charset="-78"/>
+                <a:ea typeface="Amiri" pitchFamily="2" charset="-78"/>
                 <a:cs typeface="Amiri" pitchFamily="2" charset="-78"/>
               </a:rPr>
               <a:t>كَمْ لُغَةً تَسْتَخْدِمُ فِي يَوْمٍ عَادِيٍّ؟</a:t>
@@ -12834,6 +12940,7 @@
                   <a:srgbClr val="1B3B6F"/>
                 </a:solidFill>
                 <a:latin typeface="Amiri" pitchFamily="2" charset="-78"/>
+                <a:ea typeface="Amiri" pitchFamily="2" charset="-78"/>
                 <a:cs typeface="Amiri" pitchFamily="2" charset="-78"/>
               </a:rPr>
               <a:t>الطَّرِيقَةُ الَّتِي تُسَاعِدُنِي أَكْثَرَ هِيَ مُشَاهَدَةُ المُسَلْسَلَاتِ مَعَ التَّرْجَمَةِ، ثُمَّ تَكْرَارُ الجُمَلِ بِصَوْتٍ عَالٍ.</a:t>
@@ -12910,6 +13017,7 @@
                   <a:srgbClr val="1B3B6F"/>
                 </a:solidFill>
                 <a:latin typeface="Amiri" pitchFamily="2" charset="-78"/>
+                <a:ea typeface="Amiri" pitchFamily="2" charset="-78"/>
                 <a:cs typeface="Amiri" pitchFamily="2" charset="-78"/>
               </a:rPr>
               <a:t>مَا الطَّرِيقَةُ الَّتِي تُسَاعِدُكَ أَكْثَرَ؟</a:t>
@@ -13013,6 +13121,7 @@
                   <a:srgbClr val="1B3B6F"/>
                 </a:solidFill>
                 <a:latin typeface="Amiri" pitchFamily="2" charset="-78"/>
+                <a:ea typeface="Amiri" pitchFamily="2" charset="-78"/>
                 <a:cs typeface="Amiri" pitchFamily="2" charset="-78"/>
               </a:rPr>
               <a:t>نَتَّصِلُ بِهِمْ بِمُكَالَمَةِ فِيدْيُو كُلَّ يَوْمِ جُمُعَةٍ، وَأُرْسِلُ رَسَائِلَ صَوْتِيَّةً إِلَى ابْنِ عَمِّي، لِأَنَّهُ لَا يُحِبُّ الكِتَابَةَ.</a:t>
@@ -13089,6 +13198,7 @@
                   <a:srgbClr val="1B3B6F"/>
                 </a:solidFill>
                 <a:latin typeface="Amiri" pitchFamily="2" charset="-78"/>
+                <a:ea typeface="Amiri" pitchFamily="2" charset="-78"/>
                 <a:cs typeface="Amiri" pitchFamily="2" charset="-78"/>
               </a:rPr>
               <a:t>كَيْفَ تَتَوَاصَلُ مَعَ أَقَارِبِكَ فِي الخَارِجِ؟</a:t>
@@ -13192,6 +13302,7 @@
                   <a:srgbClr val="1B3B6F"/>
                 </a:solidFill>
                 <a:latin typeface="Amiri" pitchFamily="2" charset="-78"/>
+                <a:ea typeface="Amiri" pitchFamily="2" charset="-78"/>
                 <a:cs typeface="Amiri" pitchFamily="2" charset="-78"/>
               </a:rPr>
               <a:t>أَصْعَبُ شَيْءٍ أَنَّنِي أَخْلِطُ بَيْنَ اللُّغَاتِ أَحْيَانًا؛ لِذٰلِكَ أُخَصِّصُ لِكُلِّ لُغَةٍ مَكَانًا وَوَقْتًا.</a:t>
@@ -13268,6 +13379,7 @@
                   <a:srgbClr val="1B3B6F"/>
                 </a:solidFill>
                 <a:latin typeface="Amiri" pitchFamily="2" charset="-78"/>
+                <a:ea typeface="Amiri" pitchFamily="2" charset="-78"/>
                 <a:cs typeface="Amiri" pitchFamily="2" charset="-78"/>
               </a:rPr>
               <a:t>مَا أَصْعَبُ شَيْءٍ؟</a:t>
@@ -13371,6 +13483,7 @@
                   <a:srgbClr val="1B3B6F"/>
                 </a:solidFill>
                 <a:latin typeface="Amiri" pitchFamily="2" charset="-78"/>
+                <a:ea typeface="Amiri" pitchFamily="2" charset="-78"/>
                 <a:cs typeface="Amiri" pitchFamily="2" charset="-78"/>
               </a:rPr>
               <a:t>نَعَمْ، مَرَّةً طَلَبْتُ مِنْ خَالِي "كُرْسِيًّا" بَدَلًا مِنْ "كُرَةٍ"، فَأَحْضَرَ لِي كُرْسِيًّا، وَضَحِكْنَا كَثِيرًا!</a:t>
@@ -13447,6 +13560,7 @@
                   <a:srgbClr val="1B3B6F"/>
                 </a:solidFill>
                 <a:latin typeface="Amiri" pitchFamily="2" charset="-78"/>
+                <a:ea typeface="Amiri" pitchFamily="2" charset="-78"/>
                 <a:cs typeface="Amiri" pitchFamily="2" charset="-78"/>
               </a:rPr>
               <a:t>هَلْ حَدَثَ مَعَكَ سُوءُ فَهْمٍ مُضْحِكٌ؟</a:t>
@@ -13656,6 +13770,7 @@
                   <a:srgbClr val="D4AF37"/>
                 </a:solidFill>
                 <a:latin typeface="Amiri" pitchFamily="2" charset="-78"/>
+                <a:ea typeface="Amiri" pitchFamily="2" charset="-78"/>
                 <a:cs typeface="Amiri" pitchFamily="2" charset="-78"/>
               </a:rPr>
               <a:t>م</a:t>
@@ -13976,6 +14091,7 @@
                   <a:srgbClr val="8A6D1E"/>
                 </a:solidFill>
                 <a:latin typeface="Amiri" pitchFamily="2" charset="-78"/>
+                <a:ea typeface="Amiri" pitchFamily="2" charset="-78"/>
                 <a:cs typeface="Amiri" pitchFamily="2" charset="-78"/>
               </a:rPr>
               <a:t>نَمُوذَجُ الإِجَابَةِ</a:t>
@@ -14218,6 +14334,7 @@
                   <a:srgbClr val="1B3B6F"/>
                 </a:solidFill>
                 <a:latin typeface="Amiri" pitchFamily="2" charset="-78"/>
+                <a:ea typeface="Amiri" pitchFamily="2" charset="-78"/>
                 <a:cs typeface="Amiri" pitchFamily="2" charset="-78"/>
               </a:rPr>
               <a:t>يَسُرُّنِي أَنْ أَتَقَدَّمَ لِهٰذَا الدَّوْرِ؛ فَقَدْ رَأَيْتُ كَيْفَ عَانَتْ جَدَّتِي عِنْدَمَا وَصَلَتْ إِلَى بَرِيطَانْيَا دُونَ أَنْ تَعْرِفَ كَلِمَةً إِنْجْلِيزِيَّةً.</a:t>
@@ -14294,6 +14411,7 @@
                   <a:srgbClr val="1B3B6F"/>
                 </a:solidFill>
                 <a:latin typeface="Amiri" pitchFamily="2" charset="-78"/>
+                <a:ea typeface="Amiri" pitchFamily="2" charset="-78"/>
                 <a:cs typeface="Amiri" pitchFamily="2" charset="-78"/>
               </a:rPr>
               <a:t>لِمَاذَا تُرِيدُ أَنْ تَتَطَوَّعَ مُتَرْجِمًا؟</a:t>
@@ -14397,6 +14515,7 @@
                   <a:srgbClr val="1B3B6F"/>
                 </a:solidFill>
                 <a:latin typeface="Amiri" pitchFamily="2" charset="-78"/>
+                <a:ea typeface="Amiri" pitchFamily="2" charset="-78"/>
                 <a:cs typeface="Amiri" pitchFamily="2" charset="-78"/>
               </a:rPr>
               <a:t>أَوَّلًا، إِتْقَانُ اللُّغَتَيْنِ؛ بِالإِضَافَةِ إِلَى ذٰلِكَ، الدِّقَّةُ وَالحِيَادُ وَاحْتِرَامُ الخُصُوصِيَّةِ، لِأَنَّ النَّاسَ يَثِقُونَ بِمَنْ يُتَرْجِمُ لَهُمْ.</a:t>
@@ -14473,6 +14592,7 @@
                   <a:srgbClr val="1B3B6F"/>
                 </a:solidFill>
                 <a:latin typeface="Amiri" pitchFamily="2" charset="-78"/>
+                <a:ea typeface="Amiri" pitchFamily="2" charset="-78"/>
                 <a:cs typeface="Amiri" pitchFamily="2" charset="-78"/>
               </a:rPr>
               <a:t>مَا المَهَارَاتُ الَّتِي يَحْتَاجُ إِلَيْهَا المُتَرْجِمُ؟</a:t>
@@ -14576,6 +14696,7 @@
                   <a:srgbClr val="1B3B6F"/>
                 </a:solidFill>
                 <a:latin typeface="Amiri" pitchFamily="2" charset="-78"/>
+                <a:ea typeface="Amiri" pitchFamily="2" charset="-78"/>
                 <a:cs typeface="Amiri" pitchFamily="2" charset="-78"/>
               </a:rPr>
               <a:t>نَعَمْ، أُتَرْجِمُ لِوَالِدَتِي عِنْدَمَا تَزُورُ الطَّبِيبَ، مِمَّا عَلَّمَنِي الصَّبْرَ وَكَثِيرًا مِنَ المُفْرَدَاتِ الطِّبِّيَّةِ.</a:t>
@@ -14652,6 +14773,7 @@
                   <a:srgbClr val="1B3B6F"/>
                 </a:solidFill>
                 <a:latin typeface="Amiri" pitchFamily="2" charset="-78"/>
+                <a:ea typeface="Amiri" pitchFamily="2" charset="-78"/>
                 <a:cs typeface="Amiri" pitchFamily="2" charset="-78"/>
               </a:rPr>
               <a:t>هَلْ تُتَرْجِمُ لِأَحَدٍ الآنَ؟</a:t>
@@ -14755,6 +14877,7 @@
                   <a:srgbClr val="1B3B6F"/>
                 </a:solidFill>
                 <a:latin typeface="Amiri" pitchFamily="2" charset="-78"/>
+                <a:ea typeface="Amiri" pitchFamily="2" charset="-78"/>
                 <a:cs typeface="Amiri" pitchFamily="2" charset="-78"/>
               </a:rPr>
               <a:t>صَحِيحٌ أَنَّهَا سَرِيعَةٌ وَمُفِيدَةٌ، غَيْرَ أَنَّهَا لَا تَفْهَمُ المَشَاعِرَ وَلَا الثَّقَافَةَ، وَقَدْ تُخْطِئُ فِي كَلِمَةٍ تُغَيِّرُ المَعْنَى كُلَّهُ.</a:t>
@@ -14831,6 +14954,7 @@
                   <a:srgbClr val="1B3B6F"/>
                 </a:solidFill>
                 <a:latin typeface="Amiri" pitchFamily="2" charset="-78"/>
+                <a:ea typeface="Amiri" pitchFamily="2" charset="-78"/>
                 <a:cs typeface="Amiri" pitchFamily="2" charset="-78"/>
               </a:rPr>
               <a:t>أَلَيْسَتِ التَّرْجَمَةُ الآلِيَّةُ كَافِيَةً اليَوْمَ؟</a:t>
@@ -14934,6 +15058,7 @@
                   <a:srgbClr val="1B3B6F"/>
                 </a:solidFill>
                 <a:latin typeface="Amiri" pitchFamily="2" charset="-78"/>
+                <a:ea typeface="Amiri" pitchFamily="2" charset="-78"/>
                 <a:cs typeface="Amiri" pitchFamily="2" charset="-78"/>
               </a:rPr>
               <a:t>لَوْ طَلَبَ مِنِّي ذٰلِكَ، لَشَرَحْتُ لَهُ بِلُطْفٍ أَنَّ المُتَرْجِمَ الأَمِينَ يَنْقُلُ الكَلَامَ كَمَا هُوَ، وَإِلَّا فَقَدَ ثِقَةَ الجَمِيعِ.</a:t>
@@ -15010,6 +15135,7 @@
                   <a:srgbClr val="1B3B6F"/>
                 </a:solidFill>
                 <a:latin typeface="Amiri" pitchFamily="2" charset="-78"/>
+                <a:ea typeface="Amiri" pitchFamily="2" charset="-78"/>
                 <a:cs typeface="Amiri" pitchFamily="2" charset="-78"/>
               </a:rPr>
               <a:t>لَوْ طَلَبَ مِنْكَ شَخْصٌ أَنْ تُغَيِّرَ كَلَامَهُ، مَاذَا تَفْعَلُ؟</a:t>
@@ -15219,6 +15345,7 @@
                   <a:srgbClr val="D4AF37"/>
                 </a:solidFill>
                 <a:latin typeface="Amiri" pitchFamily="2" charset="-78"/>
+                <a:ea typeface="Amiri" pitchFamily="2" charset="-78"/>
                 <a:cs typeface="Amiri" pitchFamily="2" charset="-78"/>
               </a:rPr>
               <a:t>م</a:t>
@@ -15539,6 +15666,7 @@
                   <a:srgbClr val="8A6D1E"/>
                 </a:solidFill>
                 <a:latin typeface="Amiri" pitchFamily="2" charset="-78"/>
+                <a:ea typeface="Amiri" pitchFamily="2" charset="-78"/>
                 <a:cs typeface="Amiri" pitchFamily="2" charset="-78"/>
               </a:rPr>
               <a:t>اللُّغَاتُ فِي حَيَاتِي</a:t>
@@ -15819,6 +15947,7 @@
                   <a:srgbClr val="1B3B6F"/>
                 </a:solidFill>
                 <a:latin typeface="Amiri" pitchFamily="2" charset="-78"/>
+                <a:ea typeface="Amiri" pitchFamily="2" charset="-78"/>
                 <a:cs typeface="Amiri" pitchFamily="2" charset="-78"/>
               </a:rPr>
               <a:t>أَتَكَلَّمُ … وَ…</a:t>
@@ -15895,6 +16024,7 @@
                   <a:srgbClr val="1B3B6F"/>
                 </a:solidFill>
                 <a:latin typeface="Amiri" pitchFamily="2" charset="-78"/>
+                <a:ea typeface="Amiri" pitchFamily="2" charset="-78"/>
                 <a:cs typeface="Amiri" pitchFamily="2" charset="-78"/>
               </a:rPr>
               <a:t>مَا اللُّغَاتُ الَّتِي تَتَكَلَّمُهَا؟</a:t>
@@ -16063,6 +16193,7 @@
                   <a:srgbClr val="1B3B6F"/>
                 </a:solidFill>
                 <a:latin typeface="Amiri" pitchFamily="2" charset="-78"/>
+                <a:ea typeface="Amiri" pitchFamily="2" charset="-78"/>
                 <a:cs typeface="Amiri" pitchFamily="2" charset="-78"/>
               </a:rPr>
               <a:t>فِي البَيْتِ أَتَكَلَّمُ …</a:t>
@@ -16139,6 +16270,7 @@
                   <a:srgbClr val="1B3B6F"/>
                 </a:solidFill>
                 <a:latin typeface="Amiri" pitchFamily="2" charset="-78"/>
+                <a:ea typeface="Amiri" pitchFamily="2" charset="-78"/>
                 <a:cs typeface="Amiri" pitchFamily="2" charset="-78"/>
               </a:rPr>
               <a:t>أَيَّ لُغَةٍ تَتَكَلَّمُ فِي البَيْتِ؟</a:t>
@@ -16307,6 +16439,7 @@
                   <a:srgbClr val="1B3B6F"/>
                 </a:solidFill>
                 <a:latin typeface="Amiri" pitchFamily="2" charset="-78"/>
+                <a:ea typeface="Amiri" pitchFamily="2" charset="-78"/>
                 <a:cs typeface="Amiri" pitchFamily="2" charset="-78"/>
               </a:rPr>
               <a:t>أَكْتُبُ … / أَسْتَخْدِمُ …</a:t>
@@ -16383,6 +16516,7 @@
                   <a:srgbClr val="1B3B6F"/>
                 </a:solidFill>
                 <a:latin typeface="Amiri" pitchFamily="2" charset="-78"/>
+                <a:ea typeface="Amiri" pitchFamily="2" charset="-78"/>
                 <a:cs typeface="Amiri" pitchFamily="2" charset="-78"/>
               </a:rPr>
               <a:t>كَيْفَ تَتَعَلَّمُ الكَلِمَاتِ الجَدِيدَةَ؟</a:t>
@@ -16551,6 +16685,7 @@
                   <a:srgbClr val="1B3B6F"/>
                 </a:solidFill>
                 <a:latin typeface="Amiri" pitchFamily="2" charset="-78"/>
+                <a:ea typeface="Amiri" pitchFamily="2" charset="-78"/>
                 <a:cs typeface="Amiri" pitchFamily="2" charset="-78"/>
               </a:rPr>
               <a:t>نَعَمْ، أُشَاهِدُ … / لَا، …</a:t>
@@ -16627,6 +16762,7 @@
                   <a:srgbClr val="1B3B6F"/>
                 </a:solidFill>
                 <a:latin typeface="Amiri" pitchFamily="2" charset="-78"/>
+                <a:ea typeface="Amiri" pitchFamily="2" charset="-78"/>
                 <a:cs typeface="Amiri" pitchFamily="2" charset="-78"/>
               </a:rPr>
               <a:t>هَلْ تُشَاهِدُ أَفْلَامًا بِلُغَةٍ أُخْرَى؟</a:t>
@@ -16795,6 +16931,7 @@
                   <a:srgbClr val="1B3B6F"/>
                 </a:solidFill>
                 <a:latin typeface="Amiri" pitchFamily="2" charset="-78"/>
+                <a:ea typeface="Amiri" pitchFamily="2" charset="-78"/>
                 <a:cs typeface="Amiri" pitchFamily="2" charset="-78"/>
               </a:rPr>
               <a:t>تَعَلُّمُ اللُّغَاتِ … لِأَنَّ …</a:t>
@@ -16871,6 +17008,7 @@
                   <a:srgbClr val="1B3B6F"/>
                 </a:solidFill>
                 <a:latin typeface="Amiri" pitchFamily="2" charset="-78"/>
+                <a:ea typeface="Amiri" pitchFamily="2" charset="-78"/>
                 <a:cs typeface="Amiri" pitchFamily="2" charset="-78"/>
               </a:rPr>
               <a:t>هَلْ تَعَلُّمُ اللُّغَاتِ سَهْلٌ؟</a:t>
@@ -17025,6 +17163,7 @@
                   <a:srgbClr val="1B3B6F"/>
                 </a:solidFill>
                 <a:latin typeface="Amiri" pitchFamily="2" charset="-78"/>
+                <a:ea typeface="Amiri" pitchFamily="2" charset="-78"/>
                 <a:cs typeface="Amiri" pitchFamily="2" charset="-78"/>
               </a:rPr>
               <a:t>عَفْوًا، هَلْ يُمْكِنُ أَنْ تُعِيدَ السُّؤَالَ؟</a:t>
@@ -17158,6 +17297,7 @@
                   <a:srgbClr val="D4AF37"/>
                 </a:solidFill>
                 <a:latin typeface="Amiri" pitchFamily="2" charset="-78"/>
+                <a:ea typeface="Amiri" pitchFamily="2" charset="-78"/>
                 <a:cs typeface="Amiri" pitchFamily="2" charset="-78"/>
               </a:rPr>
               <a:t>م</a:t>
@@ -17478,6 +17618,7 @@
                   <a:srgbClr val="8A6D1E"/>
                 </a:solidFill>
                 <a:latin typeface="Amiri" pitchFamily="2" charset="-78"/>
+                <a:ea typeface="Amiri" pitchFamily="2" charset="-78"/>
                 <a:cs typeface="Amiri" pitchFamily="2" charset="-78"/>
               </a:rPr>
               <a:t>التَّوَاصُلُ بِلُغَاتٍ كَثِيرَةٍ</a:t>
@@ -17761,6 +17902,7 @@
                   <a:srgbClr val="1B3B6F"/>
                 </a:solidFill>
                 <a:latin typeface="Amiri" pitchFamily="2" charset="-78"/>
+                <a:ea typeface="Amiri" pitchFamily="2" charset="-78"/>
                 <a:cs typeface="Amiri" pitchFamily="2" charset="-78"/>
               </a:rPr>
               <a:t>فِي الصَّبَاحِ … وَفِي الطَّرِيقِ … أَمَّا فِي المَسَاءِ فَأُكَلِّمُ …</a:t>
@@ -17837,6 +17979,7 @@
                   <a:srgbClr val="1B3B6F"/>
                 </a:solidFill>
                 <a:latin typeface="Amiri" pitchFamily="2" charset="-78"/>
+                <a:ea typeface="Amiri" pitchFamily="2" charset="-78"/>
                 <a:cs typeface="Amiri" pitchFamily="2" charset="-78"/>
               </a:rPr>
               <a:t>صِفْ يَوْمًا عَادِيًّا بِاللُّغَاتِ الَّتِي تَسْتَخْدِمُهَا.</a:t>
@@ -17940,6 +18083,7 @@
                   <a:srgbClr val="1B3B6F"/>
                 </a:solidFill>
                 <a:latin typeface="Amiri" pitchFamily="2" charset="-78"/>
+                <a:ea typeface="Amiri" pitchFamily="2" charset="-78"/>
                 <a:cs typeface="Amiri" pitchFamily="2" charset="-78"/>
               </a:rPr>
               <a:t>الشَّخْصُ الَّذِي … هُوَ …</a:t>
@@ -18016,6 +18160,7 @@
                   <a:srgbClr val="1B3B6F"/>
                 </a:solidFill>
                 <a:latin typeface="Amiri" pitchFamily="2" charset="-78"/>
+                <a:ea typeface="Amiri" pitchFamily="2" charset="-78"/>
                 <a:cs typeface="Amiri" pitchFamily="2" charset="-78"/>
               </a:rPr>
               <a:t>مَنِ الشَّخْصُ الَّذِي تَتَوَاصَلُ مَعَهُ بِلُغَةٍ أُخْرَى؟</a:t>
@@ -18119,6 +18264,7 @@
                   <a:srgbClr val="1B3B6F"/>
                 </a:solidFill>
                 <a:latin typeface="Amiri" pitchFamily="2" charset="-78"/>
+                <a:ea typeface="Amiri" pitchFamily="2" charset="-78"/>
                 <a:cs typeface="Amiri" pitchFamily="2" charset="-78"/>
               </a:rPr>
               <a:t>أَوَّلًا … بِالإِضَافَةِ إِلَى ذٰلِكَ …</a:t>
@@ -18195,6 +18341,7 @@
                   <a:srgbClr val="1B3B6F"/>
                 </a:solidFill>
                 <a:latin typeface="Amiri" pitchFamily="2" charset="-78"/>
+                <a:ea typeface="Amiri" pitchFamily="2" charset="-78"/>
                 <a:cs typeface="Amiri" pitchFamily="2" charset="-78"/>
               </a:rPr>
               <a:t>مَا فَوَائِدُ أَنْ تَكُونَ ثُنَائِيَّ اللُّغَةِ؟</a:t>
@@ -18298,6 +18445,7 @@
                   <a:srgbClr val="1B3B6F"/>
                 </a:solidFill>
                 <a:latin typeface="Amiri" pitchFamily="2" charset="-78"/>
+                <a:ea typeface="Amiri" pitchFamily="2" charset="-78"/>
                 <a:cs typeface="Amiri" pitchFamily="2" charset="-78"/>
               </a:rPr>
               <a:t>كُنْتُ … أَمَّا الآنَ فَأَدْرُسُ …</a:t>
@@ -18374,6 +18522,7 @@
                   <a:srgbClr val="1B3B6F"/>
                 </a:solidFill>
                 <a:latin typeface="Amiri" pitchFamily="2" charset="-78"/>
+                <a:ea typeface="Amiri" pitchFamily="2" charset="-78"/>
                 <a:cs typeface="Amiri" pitchFamily="2" charset="-78"/>
               </a:rPr>
               <a:t>كَيْفَ كُنْتَ تَتَعَلَّمُ عِنْدَمَا كُنْتَ صَغِيرًا؟</a:t>
@@ -18477,6 +18626,7 @@
                   <a:srgbClr val="1B3B6F"/>
                 </a:solidFill>
                 <a:latin typeface="Amiri" pitchFamily="2" charset="-78"/>
+                <a:ea typeface="Amiri" pitchFamily="2" charset="-78"/>
                 <a:cs typeface="Amiri" pitchFamily="2" charset="-78"/>
               </a:rPr>
               <a:t>سَأَتَعَلَّمُ … لِكَيْ …</a:t>
@@ -18553,6 +18703,7 @@
                   <a:srgbClr val="1B3B6F"/>
                 </a:solidFill>
                 <a:latin typeface="Amiri" pitchFamily="2" charset="-78"/>
+                <a:ea typeface="Amiri" pitchFamily="2" charset="-78"/>
                 <a:cs typeface="Amiri" pitchFamily="2" charset="-78"/>
               </a:rPr>
               <a:t>أَيُّ لُغَةٍ سَتَتَعَلَّمُ فِي المُسْتَقْبَلِ؟ وَلِمَاذَا؟</a:t>
@@ -18762,6 +18913,7 @@
                   <a:srgbClr val="D4AF37"/>
                 </a:solidFill>
                 <a:latin typeface="Amiri" pitchFamily="2" charset="-78"/>
+                <a:ea typeface="Amiri" pitchFamily="2" charset="-78"/>
                 <a:cs typeface="Amiri" pitchFamily="2" charset="-78"/>
               </a:rPr>
               <a:t>م</a:t>
@@ -19082,6 +19234,7 @@
                   <a:srgbClr val="8A6D1E"/>
                 </a:solidFill>
                 <a:latin typeface="Amiri" pitchFamily="2" charset="-78"/>
+                <a:ea typeface="Amiri" pitchFamily="2" charset="-78"/>
                 <a:cs typeface="Amiri" pitchFamily="2" charset="-78"/>
               </a:rPr>
               <a:t>اللُّغَةُ وَالتَّوَاصُلُ فِي العَالَمِ</a:t>
@@ -19362,6 +19515,7 @@
                   <a:srgbClr val="1B3B6F"/>
                 </a:solidFill>
                 <a:latin typeface="Amiri" pitchFamily="2" charset="-78"/>
+                <a:ea typeface="Amiri" pitchFamily="2" charset="-78"/>
                 <a:cs typeface="Amiri" pitchFamily="2" charset="-78"/>
               </a:rPr>
               <a:t>صَحِيحٌ أَنَّ … غَيْرَ أَنَّ …</a:t>
@@ -19438,6 +19592,7 @@
                   <a:srgbClr val="1B3B6F"/>
                 </a:solidFill>
                 <a:latin typeface="Amiri" pitchFamily="2" charset="-78"/>
+                <a:ea typeface="Amiri" pitchFamily="2" charset="-78"/>
                 <a:cs typeface="Amiri" pitchFamily="2" charset="-78"/>
               </a:rPr>
               <a:t>هَلْ سَتُغْنِينَا التَّرْجَمَةُ الآلِيَّةُ عَنْ تَعَلُّمِ اللُّغَاتِ؟</a:t>
@@ -19541,6 +19696,7 @@
                   <a:srgbClr val="1B3B6F"/>
                 </a:solidFill>
                 <a:latin typeface="Amiri" pitchFamily="2" charset="-78"/>
+                <a:ea typeface="Amiri" pitchFamily="2" charset="-78"/>
                 <a:cs typeface="Amiri" pitchFamily="2" charset="-78"/>
               </a:rPr>
               <a:t>مِنْ نَاحِيَةٍ … وَمِنْ نَاحِيَةٍ أُخْرَى …</a:t>
@@ -19617,6 +19773,7 @@
                   <a:srgbClr val="1B3B6F"/>
                 </a:solidFill>
                 <a:latin typeface="Amiri" pitchFamily="2" charset="-78"/>
+                <a:ea typeface="Amiri" pitchFamily="2" charset="-78"/>
                 <a:cs typeface="Amiri" pitchFamily="2" charset="-78"/>
               </a:rPr>
               <a:t>هَلِ الفُصْحَى أَهَمُّ مِنَ اللَّهَجَاتِ؟</a:t>
@@ -19720,6 +19877,7 @@
                   <a:srgbClr val="1B3B6F"/>
                 </a:solidFill>
                 <a:latin typeface="Amiri" pitchFamily="2" charset="-78"/>
+                <a:ea typeface="Amiri" pitchFamily="2" charset="-78"/>
                 <a:cs typeface="Amiri" pitchFamily="2" charset="-78"/>
               </a:rPr>
               <a:t>كَانَ جَدِّي … أَمَّا اليَوْمَ فَنَرَى … مِمَّا …</a:t>
@@ -19796,6 +19954,7 @@
                   <a:srgbClr val="1B3B6F"/>
                 </a:solidFill>
                 <a:latin typeface="Amiri" pitchFamily="2" charset="-78"/>
+                <a:ea typeface="Amiri" pitchFamily="2" charset="-78"/>
                 <a:cs typeface="Amiri" pitchFamily="2" charset="-78"/>
               </a:rPr>
               <a:t>كَيْفَ غَيَّرَتِ التِّكْنُولُوجْيَا التَّوَاصُلَ بَيْنَ الأُسَرِ المُتَفَرِّقَةِ؟</a:t>
@@ -19899,6 +20058,7 @@
                   <a:srgbClr val="1B3B6F"/>
                 </a:solidFill>
                 <a:latin typeface="Amiri" pitchFamily="2" charset="-78"/>
+                <a:ea typeface="Amiri" pitchFamily="2" charset="-78"/>
                 <a:cs typeface="Amiri" pitchFamily="2" charset="-78"/>
               </a:rPr>
               <a:t>أَرَى أَنَّ مَنْ … يَجِبُ أَنْ …</a:t>
@@ -19975,6 +20135,7 @@
                   <a:srgbClr val="1B3B6F"/>
                 </a:solidFill>
                 <a:latin typeface="Amiri" pitchFamily="2" charset="-78"/>
+                <a:ea typeface="Amiri" pitchFamily="2" charset="-78"/>
                 <a:cs typeface="Amiri" pitchFamily="2" charset="-78"/>
               </a:rPr>
               <a:t>مَا مَسْؤُولِيَّةُ مَنْ يَتَكَلَّمُ لُغَتَيْنِ فِي مُجْتَمَعِهِ؟</a:t>
@@ -20078,6 +20239,7 @@
                   <a:srgbClr val="1B3B6F"/>
                 </a:solidFill>
                 <a:latin typeface="Amiri" pitchFamily="2" charset="-78"/>
+                <a:ea typeface="Amiri" pitchFamily="2" charset="-78"/>
                 <a:cs typeface="Amiri" pitchFamily="2" charset="-78"/>
               </a:rPr>
               <a:t>لَوْ حَدَثَ ذٰلِكَ، لَخَسِرْنَا …</a:t>
@@ -20154,6 +20316,7 @@
                   <a:srgbClr val="1B3B6F"/>
                 </a:solidFill>
                 <a:latin typeface="Amiri" pitchFamily="2" charset="-78"/>
+                <a:ea typeface="Amiri" pitchFamily="2" charset="-78"/>
                 <a:cs typeface="Amiri" pitchFamily="2" charset="-78"/>
               </a:rPr>
               <a:t>لَوْ فَقَدَ العَالَمُ كُلَّ لُغَاتِهِ إِلَّا لُغَةً وَاحِدَةً، مَاذَا نَخْسَرُ؟</a:t>
@@ -20363,6 +20526,7 @@
                   <a:srgbClr val="D4AF37"/>
                 </a:solidFill>
                 <a:latin typeface="Amiri" pitchFamily="2" charset="-78"/>
+                <a:ea typeface="Amiri" pitchFamily="2" charset="-78"/>
                 <a:cs typeface="Amiri" pitchFamily="2" charset="-78"/>
               </a:rPr>
               <a:t>م</a:t>
@@ -20683,6 +20847,7 @@
                   <a:srgbClr val="8A6D1E"/>
                 </a:solidFill>
                 <a:latin typeface="Amiri" pitchFamily="2" charset="-78"/>
+                <a:ea typeface="Amiri" pitchFamily="2" charset="-78"/>
                 <a:cs typeface="Amiri" pitchFamily="2" charset="-78"/>
               </a:rPr>
               <a:t>آدَابُ الصَّفِّ</a:t>
@@ -22214,6 +22379,7 @@
                   <a:srgbClr val="D4AF37"/>
                 </a:solidFill>
                 <a:latin typeface="Amiri" pitchFamily="2" charset="-78"/>
+                <a:ea typeface="Amiri" pitchFamily="2" charset="-78"/>
                 <a:cs typeface="Amiri" pitchFamily="2" charset="-78"/>
               </a:rPr>
               <a:t>م</a:t>
@@ -22534,6 +22700,7 @@
                   <a:srgbClr val="8A6D1E"/>
                 </a:solidFill>
                 <a:latin typeface="Amiri" pitchFamily="2" charset="-78"/>
+                <a:ea typeface="Amiri" pitchFamily="2" charset="-78"/>
                 <a:cs typeface="Amiri" pitchFamily="2" charset="-78"/>
               </a:rPr>
               <a:t>نَمُوذَجُ الإِجَابَةِ</a:t>
@@ -22776,6 +22943,7 @@
                   <a:srgbClr val="1B3B6F"/>
                 </a:solidFill>
                 <a:latin typeface="Amiri" pitchFamily="2" charset="-78"/>
+                <a:ea typeface="Amiri" pitchFamily="2" charset="-78"/>
                 <a:cs typeface="Amiri" pitchFamily="2" charset="-78"/>
               </a:rPr>
               <a:t>أَتَكَلَّمُ الإِنْجْلِيزِيَّةَ وَالعَرَبِيَّةَ.</a:t>
@@ -22852,6 +23020,7 @@
                   <a:srgbClr val="1B3B6F"/>
                 </a:solidFill>
                 <a:latin typeface="Amiri" pitchFamily="2" charset="-78"/>
+                <a:ea typeface="Amiri" pitchFamily="2" charset="-78"/>
                 <a:cs typeface="Amiri" pitchFamily="2" charset="-78"/>
               </a:rPr>
               <a:t>مَا اللُّغَاتُ الَّتِي تَتَكَلَّمُهَا؟</a:t>
@@ -22955,6 +23124,7 @@
                   <a:srgbClr val="1B3B6F"/>
                 </a:solidFill>
                 <a:latin typeface="Amiri" pitchFamily="2" charset="-78"/>
+                <a:ea typeface="Amiri" pitchFamily="2" charset="-78"/>
                 <a:cs typeface="Amiri" pitchFamily="2" charset="-78"/>
               </a:rPr>
               <a:t>فِي البَيْتِ أَتَكَلَّمُ العَرَبِيَّةَ مَعَ أُمِّي.</a:t>
@@ -23031,6 +23201,7 @@
                   <a:srgbClr val="1B3B6F"/>
                 </a:solidFill>
                 <a:latin typeface="Amiri" pitchFamily="2" charset="-78"/>
+                <a:ea typeface="Amiri" pitchFamily="2" charset="-78"/>
                 <a:cs typeface="Amiri" pitchFamily="2" charset="-78"/>
               </a:rPr>
               <a:t>أَيَّ لُغَةٍ تَتَكَلَّمُ فِي البَيْتِ؟</a:t>
@@ -23134,6 +23305,7 @@
                   <a:srgbClr val="1B3B6F"/>
                 </a:solidFill>
                 <a:latin typeface="Amiri" pitchFamily="2" charset="-78"/>
+                <a:ea typeface="Amiri" pitchFamily="2" charset="-78"/>
                 <a:cs typeface="Amiri" pitchFamily="2" charset="-78"/>
               </a:rPr>
               <a:t>أَكْتُبُهَا فِي دَفْتَرٍ، وَأُرَاجِعُهَا كُلَّ يَوْمٍ.</a:t>
@@ -23210,6 +23382,7 @@
                   <a:srgbClr val="1B3B6F"/>
                 </a:solidFill>
                 <a:latin typeface="Amiri" pitchFamily="2" charset="-78"/>
+                <a:ea typeface="Amiri" pitchFamily="2" charset="-78"/>
                 <a:cs typeface="Amiri" pitchFamily="2" charset="-78"/>
               </a:rPr>
               <a:t>كَيْفَ تَتَعَلَّمُ الكَلِمَاتِ الجَدِيدَةَ؟</a:t>
@@ -23313,6 +23486,7 @@
                   <a:srgbClr val="1B3B6F"/>
                 </a:solidFill>
                 <a:latin typeface="Amiri" pitchFamily="2" charset="-78"/>
+                <a:ea typeface="Amiri" pitchFamily="2" charset="-78"/>
                 <a:cs typeface="Amiri" pitchFamily="2" charset="-78"/>
               </a:rPr>
               <a:t>نَعَمْ، أُشَاهِدُ أَفْلَامًا تُرْكِيَّةً مَعَ التَّرْجَمَةِ.</a:t>
@@ -23389,6 +23563,7 @@
                   <a:srgbClr val="1B3B6F"/>
                 </a:solidFill>
                 <a:latin typeface="Amiri" pitchFamily="2" charset="-78"/>
+                <a:ea typeface="Amiri" pitchFamily="2" charset="-78"/>
                 <a:cs typeface="Amiri" pitchFamily="2" charset="-78"/>
               </a:rPr>
               <a:t>هَلْ تُشَاهِدُ أَفْلَامًا بِلُغَةٍ أُخْرَى؟</a:t>
@@ -23492,6 +23667,7 @@
                   <a:srgbClr val="1B3B6F"/>
                 </a:solidFill>
                 <a:latin typeface="Amiri" pitchFamily="2" charset="-78"/>
+                <a:ea typeface="Amiri" pitchFamily="2" charset="-78"/>
                 <a:cs typeface="Amiri" pitchFamily="2" charset="-78"/>
               </a:rPr>
               <a:t>تَعَلُّمُ اللُّغَاتِ صَعْبٌ قَلِيلًا، لٰكِنَّهُ مُمْتِعٌ.</a:t>
@@ -23568,6 +23744,7 @@
                   <a:srgbClr val="1B3B6F"/>
                 </a:solidFill>
                 <a:latin typeface="Amiri" pitchFamily="2" charset="-78"/>
+                <a:ea typeface="Amiri" pitchFamily="2" charset="-78"/>
                 <a:cs typeface="Amiri" pitchFamily="2" charset="-78"/>
               </a:rPr>
               <a:t>هَلْ تَعَلُّمُ اللُّغَاتِ سَهْلٌ؟</a:t>
@@ -23777,6 +23954,7 @@
                   <a:srgbClr val="D4AF37"/>
                 </a:solidFill>
                 <a:latin typeface="Amiri" pitchFamily="2" charset="-78"/>
+                <a:ea typeface="Amiri" pitchFamily="2" charset="-78"/>
                 <a:cs typeface="Amiri" pitchFamily="2" charset="-78"/>
               </a:rPr>
               <a:t>م</a:t>
@@ -24097,6 +24275,7 @@
                   <a:srgbClr val="8A6D1E"/>
                 </a:solidFill>
                 <a:latin typeface="Amiri" pitchFamily="2" charset="-78"/>
+                <a:ea typeface="Amiri" pitchFamily="2" charset="-78"/>
                 <a:cs typeface="Amiri" pitchFamily="2" charset="-78"/>
               </a:rPr>
               <a:t>نَمُوذَجُ الإِجَابَةِ</a:t>
@@ -24339,6 +24518,7 @@
                   <a:srgbClr val="1B3B6F"/>
                 </a:solidFill>
                 <a:latin typeface="Amiri" pitchFamily="2" charset="-78"/>
+                <a:ea typeface="Amiri" pitchFamily="2" charset="-78"/>
                 <a:cs typeface="Amiri" pitchFamily="2" charset="-78"/>
               </a:rPr>
               <a:t>فِي الصَّبَاحِ أَسْمَعُ الأَخْبَارَ بِالإِنْجْلِيزِيَّةِ، وَفِي الطَّرِيقِ أَقْرَأُ القُرْآنَ بِالعَرَبِيَّةِ، أَمَّا فِي المَسَاءِ فَأُكَلِّمُ جَدِّي بِالصُّومَالِيَّةِ.</a:t>
@@ -24415,6 +24595,7 @@
                   <a:srgbClr val="1B3B6F"/>
                 </a:solidFill>
                 <a:latin typeface="Amiri" pitchFamily="2" charset="-78"/>
+                <a:ea typeface="Amiri" pitchFamily="2" charset="-78"/>
                 <a:cs typeface="Amiri" pitchFamily="2" charset="-78"/>
               </a:rPr>
               <a:t>صِفْ يَوْمًا عَادِيًّا بِاللُّغَاتِ الَّتِي تَسْتَخْدِمُهَا.</a:t>
@@ -24518,6 +24699,7 @@
                   <a:srgbClr val="1B3B6F"/>
                 </a:solidFill>
                 <a:latin typeface="Amiri" pitchFamily="2" charset="-78"/>
+                <a:ea typeface="Amiri" pitchFamily="2" charset="-78"/>
                 <a:cs typeface="Amiri" pitchFamily="2" charset="-78"/>
               </a:rPr>
               <a:t>الشَّخْصُ الَّذِي أَتَوَاصَلُ مَعَهُ أَكْثَرَ هُوَ ابْنُ خَالَتِي فِي مِصْرَ؛ نَتَرَاسَلُ يَوْمِيًّا، وَيُصَحِّحُ أَخْطَائِي.</a:t>
@@ -24594,6 +24776,7 @@
                   <a:srgbClr val="1B3B6F"/>
                 </a:solidFill>
                 <a:latin typeface="Amiri" pitchFamily="2" charset="-78"/>
+                <a:ea typeface="Amiri" pitchFamily="2" charset="-78"/>
                 <a:cs typeface="Amiri" pitchFamily="2" charset="-78"/>
               </a:rPr>
               <a:t>مَنِ الشَّخْصُ الَّذِي تَتَوَاصَلُ مَعَهُ بِلُغَةٍ أُخْرَى؟</a:t>
@@ -24697,6 +24880,7 @@
                   <a:srgbClr val="1B3B6F"/>
                 </a:solidFill>
                 <a:latin typeface="Amiri" pitchFamily="2" charset="-78"/>
+                <a:ea typeface="Amiri" pitchFamily="2" charset="-78"/>
                 <a:cs typeface="Amiri" pitchFamily="2" charset="-78"/>
               </a:rPr>
               <a:t>أَوَّلًا، التَّوَاصُلُ مَعَ نَاسٍ أَكْثَرَ؛ بِالإِضَافَةِ إِلَى ذٰلِكَ، فُرَصُ العَمَلِ وَفَهْمُ ثَقَافَتَيْنِ مِنَ الدَّاخِلِ.</a:t>
@@ -24773,6 +24957,7 @@
                   <a:srgbClr val="1B3B6F"/>
                 </a:solidFill>
                 <a:latin typeface="Amiri" pitchFamily="2" charset="-78"/>
+                <a:ea typeface="Amiri" pitchFamily="2" charset="-78"/>
                 <a:cs typeface="Amiri" pitchFamily="2" charset="-78"/>
               </a:rPr>
               <a:t>مَا فَوَائِدُ أَنْ تَكُونَ ثُنَائِيَّ اللُّغَةِ؟</a:t>
@@ -24876,6 +25061,7 @@
                   <a:srgbClr val="1B3B6F"/>
                 </a:solidFill>
                 <a:latin typeface="Amiri" pitchFamily="2" charset="-78"/>
+                <a:ea typeface="Amiri" pitchFamily="2" charset="-78"/>
                 <a:cs typeface="Amiri" pitchFamily="2" charset="-78"/>
               </a:rPr>
               <a:t>كُنْتُ أَحْفَظُ الأَغَانِيَ وَالأَنَاشِيدَ، أَمَّا الآنَ فَأَدْرُسُ القَوَاعِدَ وَأَقْرَأُ القِصَصَ القَصِيرَةَ.</a:t>
@@ -24952,6 +25138,7 @@
                   <a:srgbClr val="1B3B6F"/>
                 </a:solidFill>
                 <a:latin typeface="Amiri" pitchFamily="2" charset="-78"/>
+                <a:ea typeface="Amiri" pitchFamily="2" charset="-78"/>
                 <a:cs typeface="Amiri" pitchFamily="2" charset="-78"/>
               </a:rPr>
               <a:t>كَيْفَ كُنْتَ تَتَعَلَّمُ عِنْدَمَا كُنْتَ صَغِيرًا؟</a:t>
@@ -25055,6 +25242,7 @@
                   <a:srgbClr val="1B3B6F"/>
                 </a:solidFill>
                 <a:latin typeface="Amiri" pitchFamily="2" charset="-78"/>
+                <a:ea typeface="Amiri" pitchFamily="2" charset="-78"/>
                 <a:cs typeface="Amiri" pitchFamily="2" charset="-78"/>
               </a:rPr>
               <a:t>سَأَتَعَلَّمُ الصِّينِيَّةَ، لِكَيْ أَعْمَلَ فِي التِّجَارَةِ الدُّوَلِيَّةِ، لِأَنَّ الصِّينَ شَرِيكٌ مُهِمٌّ لِلْعَالَمِ العَرَبِيِّ.</a:t>
@@ -25131,6 +25319,7 @@
                   <a:srgbClr val="1B3B6F"/>
                 </a:solidFill>
                 <a:latin typeface="Amiri" pitchFamily="2" charset="-78"/>
+                <a:ea typeface="Amiri" pitchFamily="2" charset="-78"/>
                 <a:cs typeface="Amiri" pitchFamily="2" charset="-78"/>
               </a:rPr>
               <a:t>أَيُّ لُغَةٍ سَتَتَعَلَّمُ فِي المُسْتَقْبَلِ؟ وَلِمَاذَا؟</a:t>
@@ -25340,6 +25529,7 @@
                   <a:srgbClr val="D4AF37"/>
                 </a:solidFill>
                 <a:latin typeface="Amiri" pitchFamily="2" charset="-78"/>
+                <a:ea typeface="Amiri" pitchFamily="2" charset="-78"/>
                 <a:cs typeface="Amiri" pitchFamily="2" charset="-78"/>
               </a:rPr>
               <a:t>م</a:t>
@@ -25660,6 +25850,7 @@
                   <a:srgbClr val="8A6D1E"/>
                 </a:solidFill>
                 <a:latin typeface="Amiri" pitchFamily="2" charset="-78"/>
+                <a:ea typeface="Amiri" pitchFamily="2" charset="-78"/>
                 <a:cs typeface="Amiri" pitchFamily="2" charset="-78"/>
               </a:rPr>
               <a:t>نَمُوذَجُ الإِجَابَةِ</a:t>
@@ -25902,6 +26093,7 @@
                   <a:srgbClr val="1B3B6F"/>
                 </a:solidFill>
                 <a:latin typeface="Amiri" pitchFamily="2" charset="-78"/>
+                <a:ea typeface="Amiri" pitchFamily="2" charset="-78"/>
                 <a:cs typeface="Amiri" pitchFamily="2" charset="-78"/>
               </a:rPr>
               <a:t>صَحِيحٌ أَنَّهَا تَتَطَوَّرُ بِسُرْعَةٍ، غَيْرَ أَنَّ تَعَلُّمَ اللُّغَةِ يَفْتَحُ القَلْبَ لَا الأُذُنَ فَقَطْ؛ فَلَا آلَةَ تَنْقُلُ النُّكْتَةَ أَوِ الدُّعَاءَ كَمَا هُوَ.</a:t>
@@ -25981,6 +26173,7 @@
                   <a:srgbClr val="1B3B6F"/>
                 </a:solidFill>
                 <a:latin typeface="Amiri" pitchFamily="2" charset="-78"/>
+                <a:ea typeface="Amiri" pitchFamily="2" charset="-78"/>
                 <a:cs typeface="Amiri" pitchFamily="2" charset="-78"/>
               </a:rPr>
               <a:t>هَلْ سَتُغْنِينَا التَّرْجَمَةُ الآلِيَّةُ عَنْ تَعَلُّمِ اللُّغَاتِ؟</a:t>
@@ -26087,6 +26280,7 @@
                   <a:srgbClr val="1B3B6F"/>
                 </a:solidFill>
                 <a:latin typeface="Amiri" pitchFamily="2" charset="-78"/>
+                <a:ea typeface="Amiri" pitchFamily="2" charset="-78"/>
                 <a:cs typeface="Amiri" pitchFamily="2" charset="-78"/>
               </a:rPr>
               <a:t>مِنْ نَاحِيَةٍ، تَجْمَعُ الفُصْحَى العَرَبَ كُلَّهُمْ فِي الكِتَابَةِ وَالإِعْلَامِ، وَمِنْ نَاحِيَةٍ أُخْرَى، اللَّهْجَةُ هِيَ لُغَةُ البَيْتِ وَالمَشَاعِرِ، لِذٰلِكَ نَحْتَاجُ إِلَى الاثْنَتَيْنِ.</a:t>
@@ -26163,6 +26357,7 @@
                   <a:srgbClr val="1B3B6F"/>
                 </a:solidFill>
                 <a:latin typeface="Amiri" pitchFamily="2" charset="-78"/>
+                <a:ea typeface="Amiri" pitchFamily="2" charset="-78"/>
                 <a:cs typeface="Amiri" pitchFamily="2" charset="-78"/>
               </a:rPr>
               <a:t>هَلِ الفُصْحَى أَهَمُّ مِنَ اللَّهَجَاتِ؟</a:t>
@@ -26266,6 +26461,7 @@
                   <a:srgbClr val="1B3B6F"/>
                 </a:solidFill>
                 <a:latin typeface="Amiri" pitchFamily="2" charset="-78"/>
+                <a:ea typeface="Amiri" pitchFamily="2" charset="-78"/>
                 <a:cs typeface="Amiri" pitchFamily="2" charset="-78"/>
               </a:rPr>
               <a:t>كَانَ جَدِّي يَنْتَظِرُ رِسَالَةً وَرَقِيَّةً شَهْرًا كَامِلًا، أَمَّا اليَوْمَ فَنَرَى بَعْضَنَا كُلَّ يَوْمٍ، مِمَّا يُقَرِّبُ المَسَافَاتِ وَيُحَافِظُ عَلَى اللُّغَةِ.</a:t>
@@ -26345,6 +26541,7 @@
                   <a:srgbClr val="1B3B6F"/>
                 </a:solidFill>
                 <a:latin typeface="Amiri" pitchFamily="2" charset="-78"/>
+                <a:ea typeface="Amiri" pitchFamily="2" charset="-78"/>
                 <a:cs typeface="Amiri" pitchFamily="2" charset="-78"/>
               </a:rPr>
               <a:t>كَيْفَ غَيَّرَتِ التِّكْنُولُوجْيَا التَّوَاصُلَ بَيْنَ الأُسَرِ المُتَفَرِّقَةِ؟</a:t>
@@ -26554,6 +26751,7 @@
                   <a:srgbClr val="D4AF37"/>
                 </a:solidFill>
                 <a:latin typeface="Amiri" pitchFamily="2" charset="-78"/>
+                <a:ea typeface="Amiri" pitchFamily="2" charset="-78"/>
                 <a:cs typeface="Amiri" pitchFamily="2" charset="-78"/>
               </a:rPr>
               <a:t>م</a:t>
@@ -26874,6 +27072,7 @@
                   <a:srgbClr val="8A6D1E"/>
                 </a:solidFill>
                 <a:latin typeface="Amiri" pitchFamily="2" charset="-78"/>
+                <a:ea typeface="Amiri" pitchFamily="2" charset="-78"/>
                 <a:cs typeface="Amiri" pitchFamily="2" charset="-78"/>
               </a:rPr>
               <a:t>نَمُوذَجُ الإِجَابَةِ</a:t>
@@ -27116,6 +27315,7 @@
                   <a:srgbClr val="1B3B6F"/>
                 </a:solidFill>
                 <a:latin typeface="Amiri" pitchFamily="2" charset="-78"/>
+                <a:ea typeface="Amiri" pitchFamily="2" charset="-78"/>
                 <a:cs typeface="Amiri" pitchFamily="2" charset="-78"/>
               </a:rPr>
               <a:t>أَرَى أَنَّ مَنْ يَتَكَلَّمُ لُغَتَيْنِ يَجِبُ أَنْ يَكُونَ جِسْرًا؛ فَيُسَاعِدَ الجِيرَانَ الجُدُدَ، وَيَشْرَحَ ثَقَافَةَ كُلِّ طَرَفٍ لِلْآخَرِ.</a:t>
@@ -27192,6 +27392,7 @@
                   <a:srgbClr val="1B3B6F"/>
                 </a:solidFill>
                 <a:latin typeface="Amiri" pitchFamily="2" charset="-78"/>
+                <a:ea typeface="Amiri" pitchFamily="2" charset="-78"/>
                 <a:cs typeface="Amiri" pitchFamily="2" charset="-78"/>
               </a:rPr>
               <a:t>مَا مَسْؤُولِيَّةُ مَنْ يَتَكَلَّمُ لُغَتَيْنِ فِي مُجْتَمَعِهِ؟</a:t>
@@ -27295,6 +27496,7 @@
                   <a:srgbClr val="1B3B6F"/>
                 </a:solidFill>
                 <a:latin typeface="Amiri" pitchFamily="2" charset="-78"/>
+                <a:ea typeface="Amiri" pitchFamily="2" charset="-78"/>
                 <a:cs typeface="Amiri" pitchFamily="2" charset="-78"/>
               </a:rPr>
               <a:t>لَوْ حَدَثَ ذٰلِكَ، لَخَسِرْنَا آلَافَ الطُّرُقِ لِرُؤْيَةِ العَالَمِ؛ فَكُلُّ لُغَةٍ تَحْمِلُ أَمْثَالًا وَأَشْعَارًا وَحِكْمَةً لَا تُوجَدُ فِي غَيْرِهَا.</a:t>
@@ -27374,6 +27576,7 @@
                   <a:srgbClr val="1B3B6F"/>
                 </a:solidFill>
                 <a:latin typeface="Amiri" pitchFamily="2" charset="-78"/>
+                <a:ea typeface="Amiri" pitchFamily="2" charset="-78"/>
                 <a:cs typeface="Amiri" pitchFamily="2" charset="-78"/>
               </a:rPr>
               <a:t>لَوْ فَقَدَ العَالَمُ كُلَّ لُغَاتِهِ إِلَّا لُغَةً وَاحِدَةً، مَاذَا نَخْسَرُ؟</a:t>
@@ -27583,6 +27786,7 @@
                   <a:srgbClr val="D4AF37"/>
                 </a:solidFill>
                 <a:latin typeface="Amiri" pitchFamily="2" charset="-78"/>
+                <a:ea typeface="Amiri" pitchFamily="2" charset="-78"/>
                 <a:cs typeface="Amiri" pitchFamily="2" charset="-78"/>
               </a:rPr>
               <a:t>م</a:t>
@@ -27903,6 +28107,7 @@
                   <a:srgbClr val="8A6D1E"/>
                 </a:solidFill>
                 <a:latin typeface="Amiri" pitchFamily="2" charset="-78"/>
+                <a:ea typeface="Amiri" pitchFamily="2" charset="-78"/>
                 <a:cs typeface="Amiri" pitchFamily="2" charset="-78"/>
               </a:rPr>
               <a:t>قَيِّمْ عَمَلَكَ</a:t>
@@ -29147,6 +29352,7 @@
                   <a:srgbClr val="FFFFFF"/>
                 </a:solidFill>
                 <a:latin typeface="Amiri" pitchFamily="2" charset="-78"/>
+                <a:ea typeface="Amiri" pitchFamily="2" charset="-78"/>
                 <a:cs typeface="Amiri" pitchFamily="2" charset="-78"/>
               </a:rPr>
               <a:t>أَحْسَنْتُمْ! إِلَى اللِّقَاءِ</a:t>
@@ -29299,6 +29505,7 @@
                   <a:srgbClr val="D4AF37"/>
                 </a:solidFill>
                 <a:latin typeface="Amiri" pitchFamily="2" charset="-78"/>
+                <a:ea typeface="Amiri" pitchFamily="2" charset="-78"/>
                 <a:cs typeface="Amiri" pitchFamily="2" charset="-78"/>
               </a:rPr>
               <a:t>وَرْشَةُ الكِتَابَةِ</a:t>
@@ -29432,6 +29639,7 @@
                   <a:srgbClr val="D4AF37"/>
                 </a:solidFill>
                 <a:latin typeface="Amiri" pitchFamily="2" charset="-78"/>
+                <a:ea typeface="Amiri" pitchFamily="2" charset="-78"/>
                 <a:cs typeface="Amiri" pitchFamily="2" charset="-78"/>
               </a:rPr>
               <a:t>م</a:t>
@@ -29752,6 +29960,7 @@
                   <a:srgbClr val="8A6D1E"/>
                 </a:solidFill>
                 <a:latin typeface="Amiri" pitchFamily="2" charset="-78"/>
+                <a:ea typeface="Amiri" pitchFamily="2" charset="-78"/>
                 <a:cs typeface="Amiri" pitchFamily="2" charset="-78"/>
               </a:rPr>
               <a:t>خَرِيطَةُ الوَرْشَةِ</a:t>
@@ -30066,6 +30275,7 @@
                   <a:srgbClr val="1B3B6F"/>
                 </a:solidFill>
                 <a:latin typeface="Amiri" pitchFamily="2" charset="-78"/>
+                <a:ea typeface="Amiri" pitchFamily="2" charset="-78"/>
                 <a:cs typeface="Amiri" pitchFamily="2" charset="-78"/>
               </a:rPr>
               <a:t>كَيْفَ</a:t>
@@ -30342,6 +30552,7 @@
                   <a:srgbClr val="1E6B52"/>
                 </a:solidFill>
                 <a:latin typeface="Amiri" pitchFamily="2" charset="-78"/>
+                <a:ea typeface="Amiri" pitchFamily="2" charset="-78"/>
                 <a:cs typeface="Amiri" pitchFamily="2" charset="-78"/>
               </a:rPr>
               <a:t>تَمْثِيلُ الدَّوْرِ</a:t>
@@ -30618,6 +30829,7 @@
                   <a:srgbClr val="8A6D1E"/>
                 </a:solidFill>
                 <a:latin typeface="Amiri" pitchFamily="2" charset="-78"/>
+                <a:ea typeface="Amiri" pitchFamily="2" charset="-78"/>
                 <a:cs typeface="Amiri" pitchFamily="2" charset="-78"/>
               </a:rPr>
               <a:t>النَّمُوذَجُ</a:t>
@@ -30894,6 +31106,7 @@
                   <a:srgbClr val="1E6B52"/>
                 </a:solidFill>
                 <a:latin typeface="Amiri" pitchFamily="2" charset="-78"/>
+                <a:ea typeface="Amiri" pitchFamily="2" charset="-78"/>
                 <a:cs typeface="Amiri" pitchFamily="2" charset="-78"/>
               </a:rPr>
               <a:t>المُحَادَثَةُ</a:t>
@@ -31170,6 +31383,7 @@
                   <a:srgbClr val="8A6D1E"/>
                 </a:solidFill>
                 <a:latin typeface="Amiri" pitchFamily="2" charset="-78"/>
+                <a:ea typeface="Amiri" pitchFamily="2" charset="-78"/>
                 <a:cs typeface="Amiri" pitchFamily="2" charset="-78"/>
               </a:rPr>
               <a:t>قَيِّمْ</a:t>
@@ -31413,6 +31627,7 @@
                   <a:srgbClr val="D4AF37"/>
                 </a:solidFill>
                 <a:latin typeface="Amiri" pitchFamily="2" charset="-78"/>
+                <a:ea typeface="Amiri" pitchFamily="2" charset="-78"/>
                 <a:cs typeface="Amiri" pitchFamily="2" charset="-78"/>
               </a:rPr>
               <a:t>م</a:t>
@@ -31733,6 +31948,7 @@
                   <a:srgbClr val="8A6D1E"/>
                 </a:solidFill>
                 <a:latin typeface="Amiri" pitchFamily="2" charset="-78"/>
+                <a:ea typeface="Amiri" pitchFamily="2" charset="-78"/>
                 <a:cs typeface="Amiri" pitchFamily="2" charset="-78"/>
               </a:rPr>
               <a:t>امْتِحَانُ التَّحَدُّثِ</a:t>
@@ -32357,6 +32573,7 @@
                   <a:srgbClr val="1B3B6F"/>
                 </a:solidFill>
                 <a:latin typeface="Amiri" pitchFamily="2" charset="-78"/>
+                <a:ea typeface="Amiri" pitchFamily="2" charset="-78"/>
                 <a:cs typeface="Amiri" pitchFamily="2" charset="-78"/>
               </a:rPr>
               <a:t>عَفْوًا، هَلْ يُمْكِنُ أَنْ تُعِيدَ السُّؤَالَ؟</a:t>
@@ -32456,6 +32673,7 @@
                   <a:srgbClr val="1B3B6F"/>
                 </a:solidFill>
                 <a:latin typeface="Amiri" pitchFamily="2" charset="-78"/>
+                <a:ea typeface="Amiri" pitchFamily="2" charset="-78"/>
                 <a:cs typeface="Amiri" pitchFamily="2" charset="-78"/>
               </a:rPr>
               <a:t>لَحْظَةً، دَعْنِي أُفَكِّرُ …</a:t>
@@ -32555,6 +32773,7 @@
                   <a:srgbClr val="1B3B6F"/>
                 </a:solidFill>
                 <a:latin typeface="Amiri" pitchFamily="2" charset="-78"/>
+                <a:ea typeface="Amiri" pitchFamily="2" charset="-78"/>
                 <a:cs typeface="Amiri" pitchFamily="2" charset="-78"/>
               </a:rPr>
               <a:t>أَقْصِدُ …</a:t>
@@ -32726,6 +32945,7 @@
                   <a:srgbClr val="D4AF37"/>
                 </a:solidFill>
                 <a:latin typeface="Amiri" pitchFamily="2" charset="-78"/>
+                <a:ea typeface="Amiri" pitchFamily="2" charset="-78"/>
                 <a:cs typeface="Amiri" pitchFamily="2" charset="-78"/>
               </a:rPr>
               <a:t>م</a:t>
@@ -33046,6 +33266,7 @@
                   <a:srgbClr val="8A6D1E"/>
                 </a:solidFill>
                 <a:latin typeface="Amiri" pitchFamily="2" charset="-78"/>
+                <a:ea typeface="Amiri" pitchFamily="2" charset="-78"/>
                 <a:cs typeface="Amiri" pitchFamily="2" charset="-78"/>
               </a:rPr>
               <a:t>الفِعْلُ وَالمَصْدَرُ</a:t>
@@ -33349,6 +33570,7 @@
                   <a:srgbClr val="1B3B6F"/>
                 </a:solidFill>
                 <a:latin typeface="Amiri" pitchFamily="2" charset="-78"/>
+                <a:ea typeface="Amiri" pitchFamily="2" charset="-78"/>
                 <a:cs typeface="Amiri" pitchFamily="2" charset="-78"/>
               </a:rPr>
               <a:t>تَعَلُّمُ اللُّغَاتِ</a:t>
@@ -33506,6 +33728,7 @@
                   <a:srgbClr val="1B3B6F"/>
                 </a:solidFill>
                 <a:latin typeface="Amiri" pitchFamily="2" charset="-78"/>
+                <a:ea typeface="Amiri" pitchFamily="2" charset="-78"/>
                 <a:cs typeface="Amiri" pitchFamily="2" charset="-78"/>
               </a:rPr>
               <a:t>مُتَعَلِّمَةٌ</a:t>
@@ -33609,6 +33832,7 @@
                   <a:srgbClr val="1B3B6F"/>
                 </a:solidFill>
                 <a:latin typeface="Amiri" pitchFamily="2" charset="-78"/>
+                <a:ea typeface="Amiri" pitchFamily="2" charset="-78"/>
                 <a:cs typeface="Amiri" pitchFamily="2" charset="-78"/>
               </a:rPr>
               <a:t>أَتَعَلَّمُ</a:t>
@@ -33874,6 +34098,7 @@
                   <a:srgbClr val="1B3B6F"/>
                 </a:solidFill>
                 <a:latin typeface="Amiri" pitchFamily="2" charset="-78"/>
+                <a:ea typeface="Amiri" pitchFamily="2" charset="-78"/>
                 <a:cs typeface="Amiri" pitchFamily="2" charset="-78"/>
               </a:rPr>
               <a:t>التَّوَاصُلُ</a:t>
@@ -34031,6 +34256,7 @@
                   <a:srgbClr val="1B3B6F"/>
                 </a:solidFill>
                 <a:latin typeface="Amiri" pitchFamily="2" charset="-78"/>
+                <a:ea typeface="Amiri" pitchFamily="2" charset="-78"/>
                 <a:cs typeface="Amiri" pitchFamily="2" charset="-78"/>
               </a:rPr>
               <a:t>وَسَائِلُ التَّوَاصُلِ</a:t>
@@ -34134,6 +34360,7 @@
                   <a:srgbClr val="1B3B6F"/>
                 </a:solidFill>
                 <a:latin typeface="Amiri" pitchFamily="2" charset="-78"/>
+                <a:ea typeface="Amiri" pitchFamily="2" charset="-78"/>
                 <a:cs typeface="Amiri" pitchFamily="2" charset="-78"/>
               </a:rPr>
               <a:t>أَتَوَاصَلُ مَعَ</a:t>
@@ -34399,6 +34626,7 @@
                   <a:srgbClr val="1B3B6F"/>
                 </a:solidFill>
                 <a:latin typeface="Amiri" pitchFamily="2" charset="-78"/>
+                <a:ea typeface="Amiri" pitchFamily="2" charset="-78"/>
                 <a:cs typeface="Amiri" pitchFamily="2" charset="-78"/>
               </a:rPr>
               <a:t>التَّرْجَمَةُ</a:t>
@@ -34556,6 +34784,7 @@
                   <a:srgbClr val="1B3B6F"/>
                 </a:solidFill>
                 <a:latin typeface="Amiri" pitchFamily="2" charset="-78"/>
+                <a:ea typeface="Amiri" pitchFamily="2" charset="-78"/>
                 <a:cs typeface="Amiri" pitchFamily="2" charset="-78"/>
               </a:rPr>
               <a:t>مُتَرْجِمٌ · مُتَرْجِمَةٌ</a:t>
@@ -34659,6 +34888,7 @@
                   <a:srgbClr val="1B3B6F"/>
                 </a:solidFill>
                 <a:latin typeface="Amiri" pitchFamily="2" charset="-78"/>
+                <a:ea typeface="Amiri" pitchFamily="2" charset="-78"/>
                 <a:cs typeface="Amiri" pitchFamily="2" charset="-78"/>
               </a:rPr>
               <a:t>أُتَرْجِمُ</a:t>
@@ -34924,6 +35154,7 @@
                   <a:srgbClr val="1B3B6F"/>
                 </a:solidFill>
                 <a:latin typeface="Amiri" pitchFamily="2" charset="-78"/>
+                <a:ea typeface="Amiri" pitchFamily="2" charset="-78"/>
                 <a:cs typeface="Amiri" pitchFamily="2" charset="-78"/>
               </a:rPr>
               <a:t>ثُنَائِيُّ اللُّغَةِ</a:t>
@@ -35081,6 +35312,7 @@
                   <a:srgbClr val="1B3B6F"/>
                 </a:solidFill>
                 <a:latin typeface="Amiri" pitchFamily="2" charset="-78"/>
+                <a:ea typeface="Amiri" pitchFamily="2" charset="-78"/>
                 <a:cs typeface="Amiri" pitchFamily="2" charset="-78"/>
               </a:rPr>
               <a:t>مُتَعَدِّدُ اللُّغَاتِ</a:t>
@@ -35184,6 +35416,7 @@
                   <a:srgbClr val="1B3B6F"/>
                 </a:solidFill>
                 <a:latin typeface="Amiri" pitchFamily="2" charset="-78"/>
+                <a:ea typeface="Amiri" pitchFamily="2" charset="-78"/>
                 <a:cs typeface="Amiri" pitchFamily="2" charset="-78"/>
               </a:rPr>
               <a:t>ثُنَائِيَّةُ اللُّغَةِ</a:t>
@@ -35449,6 +35682,7 @@
                   <a:srgbClr val="1B3B6F"/>
                 </a:solidFill>
                 <a:latin typeface="Amiri" pitchFamily="2" charset="-78"/>
+                <a:ea typeface="Amiri" pitchFamily="2" charset="-78"/>
                 <a:cs typeface="Amiri" pitchFamily="2" charset="-78"/>
               </a:rPr>
               <a:t>لَهْجَةٌ</a:t>
@@ -35606,6 +35840,7 @@
                   <a:srgbClr val="1B3B6F"/>
                 </a:solidFill>
                 <a:latin typeface="Amiri" pitchFamily="2" charset="-78"/>
+                <a:ea typeface="Amiri" pitchFamily="2" charset="-78"/>
                 <a:cs typeface="Amiri" pitchFamily="2" charset="-78"/>
               </a:rPr>
               <a:t>الفُصْحَى</a:t>
@@ -35709,6 +35944,7 @@
                   <a:srgbClr val="1B3B6F"/>
                 </a:solidFill>
                 <a:latin typeface="Amiri" pitchFamily="2" charset="-78"/>
+                <a:ea typeface="Amiri" pitchFamily="2" charset="-78"/>
                 <a:cs typeface="Amiri" pitchFamily="2" charset="-78"/>
               </a:rPr>
               <a:t>لَهَجَاتٌ</a:t>
@@ -35974,6 +36210,7 @@
                   <a:srgbClr val="1B3B6F"/>
                 </a:solidFill>
                 <a:latin typeface="Amiri" pitchFamily="2" charset="-78"/>
+                <a:ea typeface="Amiri" pitchFamily="2" charset="-78"/>
                 <a:cs typeface="Amiri" pitchFamily="2" charset="-78"/>
               </a:rPr>
               <a:t>مُكَالَمَةُ فِيدْيُو</a:t>
@@ -36131,6 +36368,7 @@
                   <a:srgbClr val="1B3B6F"/>
                 </a:solidFill>
                 <a:latin typeface="Amiri" pitchFamily="2" charset="-78"/>
+                <a:ea typeface="Amiri" pitchFamily="2" charset="-78"/>
                 <a:cs typeface="Amiri" pitchFamily="2" charset="-78"/>
               </a:rPr>
               <a:t>رِسَالَةٌ</a:t>
@@ -36234,6 +36472,7 @@
                   <a:srgbClr val="1B3B6F"/>
                 </a:solidFill>
                 <a:latin typeface="Amiri" pitchFamily="2" charset="-78"/>
+                <a:ea typeface="Amiri" pitchFamily="2" charset="-78"/>
                 <a:cs typeface="Amiri" pitchFamily="2" charset="-78"/>
               </a:rPr>
               <a:t>أَتَّصِلُ بِجَدِّي</a:t>
@@ -36367,6 +36606,7 @@
                   <a:srgbClr val="D4AF37"/>
                 </a:solidFill>
                 <a:latin typeface="Amiri" pitchFamily="2" charset="-78"/>
+                <a:ea typeface="Amiri" pitchFamily="2" charset="-78"/>
                 <a:cs typeface="Amiri" pitchFamily="2" charset="-78"/>
               </a:rPr>
               <a:t>م</a:t>
@@ -36687,6 +36927,7 @@
                   <a:srgbClr val="8A6D1E"/>
                 </a:solidFill>
                 <a:latin typeface="Amiri" pitchFamily="2" charset="-78"/>
+                <a:ea typeface="Amiri" pitchFamily="2" charset="-78"/>
                 <a:cs typeface="Amiri" pitchFamily="2" charset="-78"/>
               </a:rPr>
               <a:t>الاسْمُ المَوْصُولُ</a:t>
@@ -36990,6 +37231,7 @@
                   <a:srgbClr val="1B3B6F"/>
                 </a:solidFill>
                 <a:latin typeface="Amiri" pitchFamily="2" charset="-78"/>
+                <a:ea typeface="Amiri" pitchFamily="2" charset="-78"/>
                 <a:cs typeface="Amiri" pitchFamily="2" charset="-78"/>
               </a:rPr>
               <a:t>تَطْبِيقٌ</a:t>
@@ -37147,6 +37389,7 @@
                   <a:srgbClr val="1B3B6F"/>
                 </a:solidFill>
                 <a:latin typeface="Amiri" pitchFamily="2" charset="-78"/>
+                <a:ea typeface="Amiri" pitchFamily="2" charset="-78"/>
                 <a:cs typeface="Amiri" pitchFamily="2" charset="-78"/>
               </a:rPr>
               <a:t>قَامُوسٌ</a:t>
@@ -37250,6 +37493,7 @@
                   <a:srgbClr val="1B3B6F"/>
                 </a:solidFill>
                 <a:latin typeface="Amiri" pitchFamily="2" charset="-78"/>
+                <a:ea typeface="Amiri" pitchFamily="2" charset="-78"/>
                 <a:cs typeface="Amiri" pitchFamily="2" charset="-78"/>
               </a:rPr>
               <a:t>تَطْبِيقَاتٌ</a:t>
@@ -37515,6 +37759,7 @@
                   <a:srgbClr val="1B3B6F"/>
                 </a:solidFill>
                 <a:latin typeface="Amiri" pitchFamily="2" charset="-78"/>
+                <a:ea typeface="Amiri" pitchFamily="2" charset="-78"/>
                 <a:cs typeface="Amiri" pitchFamily="2" charset="-78"/>
               </a:rPr>
               <a:t>أَفْهَمُ · لَا أَفْهَمُ</a:t>
@@ -37672,6 +37917,7 @@
                   <a:srgbClr val="1B3B6F"/>
                 </a:solidFill>
                 <a:latin typeface="Amiri" pitchFamily="2" charset="-78"/>
+                <a:ea typeface="Amiri" pitchFamily="2" charset="-78"/>
                 <a:cs typeface="Amiri" pitchFamily="2" charset="-78"/>
               </a:rPr>
               <a:t>سُوءُ فَهْمٍ</a:t>
@@ -37775,6 +38021,7 @@
                   <a:srgbClr val="1B3B6F"/>
                 </a:solidFill>
                 <a:latin typeface="Amiri" pitchFamily="2" charset="-78"/>
+                <a:ea typeface="Amiri" pitchFamily="2" charset="-78"/>
                 <a:cs typeface="Amiri" pitchFamily="2" charset="-78"/>
               </a:rPr>
               <a:t>الفَهْمُ</a:t>
@@ -38040,6 +38287,7 @@
                   <a:srgbClr val="1B3B6F"/>
                 </a:solidFill>
                 <a:latin typeface="Amiri" pitchFamily="2" charset="-78"/>
+                <a:ea typeface="Amiri" pitchFamily="2" charset="-78"/>
                 <a:cs typeface="Amiri" pitchFamily="2" charset="-78"/>
               </a:rPr>
               <a:t>أَخْلِطُ بَيْنَ …</a:t>
@@ -38197,6 +38445,7 @@
                   <a:srgbClr val="1B3B6F"/>
                 </a:solidFill>
                 <a:latin typeface="Amiri" pitchFamily="2" charset="-78"/>
+                <a:ea typeface="Amiri" pitchFamily="2" charset="-78"/>
                 <a:cs typeface="Amiri" pitchFamily="2" charset="-78"/>
               </a:rPr>
               <a:t>أَخْطَاءٌ</a:t>
@@ -38300,6 +38549,7 @@
                   <a:srgbClr val="1B3B6F"/>
                 </a:solidFill>
                 <a:latin typeface="Amiri" pitchFamily="2" charset="-78"/>
+                <a:ea typeface="Amiri" pitchFamily="2" charset="-78"/>
                 <a:cs typeface="Amiri" pitchFamily="2" charset="-78"/>
               </a:rPr>
               <a:t>أَنْتَقِلُ إِلَى</a:t>
@@ -38565,6 +38815,7 @@
                   <a:srgbClr val="1B3B6F"/>
                 </a:solidFill>
                 <a:latin typeface="Amiri" pitchFamily="2" charset="-78"/>
+                <a:ea typeface="Amiri" pitchFamily="2" charset="-78"/>
                 <a:cs typeface="Amiri" pitchFamily="2" charset="-78"/>
               </a:rPr>
               <a:t>الَّذِي · الَّتِي</a:t>
@@ -38614,11 +38865,12 @@
               <a:buNone/>
             </a:pPr>
             <a:r>
-              <a:rPr lang="en-US" sz="1100" i="1" dirty="0">
+              <a:rPr lang="ar-SA" sz="1100" i="1" dirty="0">
                 <a:solidFill>
                   <a:srgbClr val="5A6472"/>
                 </a:solidFill>
                 <a:latin typeface="Calibri" pitchFamily="34" charset="0"/>
+                <a:ea typeface="Amiri" pitchFamily="2" charset="-78"/>
                 <a:cs typeface="Amiri" pitchFamily="2" charset="-78"/>
               </a:rPr>
               <a:t>al-َ-dhī · al-َ-tī</a:t>
@@ -38722,6 +38974,7 @@
                   <a:srgbClr val="1B3B6F"/>
                 </a:solidFill>
                 <a:latin typeface="Amiri" pitchFamily="2" charset="-78"/>
+                <a:ea typeface="Amiri" pitchFamily="2" charset="-78"/>
                 <a:cs typeface="Amiri" pitchFamily="2" charset="-78"/>
               </a:rPr>
               <a:t>مَنْ</a:t>
@@ -38825,6 +39078,7 @@
                   <a:srgbClr val="1B3B6F"/>
                 </a:solidFill>
                 <a:latin typeface="Amiri" pitchFamily="2" charset="-78"/>
+                <a:ea typeface="Amiri" pitchFamily="2" charset="-78"/>
                 <a:cs typeface="Amiri" pitchFamily="2" charset="-78"/>
               </a:rPr>
               <a:t>الَّذِينَ</a:t>
@@ -39090,6 +39344,7 @@
                   <a:srgbClr val="1B3B6F"/>
                 </a:solidFill>
                 <a:latin typeface="Amiri" pitchFamily="2" charset="-78"/>
+                <a:ea typeface="Amiri" pitchFamily="2" charset="-78"/>
                 <a:cs typeface="Amiri" pitchFamily="2" charset="-78"/>
               </a:rPr>
               <a:t>النُّطْقُ</a:t>
@@ -39247,6 +39502,7 @@
                   <a:srgbClr val="1B3B6F"/>
                 </a:solidFill>
                 <a:latin typeface="Amiri" pitchFamily="2" charset="-78"/>
+                <a:ea typeface="Amiri" pitchFamily="2" charset="-78"/>
                 <a:cs typeface="Amiri" pitchFamily="2" charset="-78"/>
               </a:rPr>
               <a:t>القَوَاعِدُ</a:t>
@@ -39350,6 +39606,7 @@
                   <a:srgbClr val="1B3B6F"/>
                 </a:solidFill>
                 <a:latin typeface="Amiri" pitchFamily="2" charset="-78"/>
+                <a:ea typeface="Amiri" pitchFamily="2" charset="-78"/>
                 <a:cs typeface="Amiri" pitchFamily="2" charset="-78"/>
               </a:rPr>
               <a:t>المُفْرَدَاتُ</a:t>
@@ -39615,6 +39872,7 @@
                   <a:srgbClr val="1B3B6F"/>
                 </a:solidFill>
                 <a:latin typeface="Amiri" pitchFamily="2" charset="-78"/>
+                <a:ea typeface="Amiri" pitchFamily="2" charset="-78"/>
                 <a:cs typeface="Amiri" pitchFamily="2" charset="-78"/>
               </a:rPr>
               <a:t>بِطَلَاقَةٍ</a:t>
@@ -39772,6 +40030,7 @@
                   <a:srgbClr val="1B3B6F"/>
                 </a:solidFill>
                 <a:latin typeface="Amiri" pitchFamily="2" charset="-78"/>
+                <a:ea typeface="Amiri" pitchFamily="2" charset="-78"/>
                 <a:cs typeface="Amiri" pitchFamily="2" charset="-78"/>
               </a:rPr>
               <a:t>بِصُعُوبَةٍ</a:t>
@@ -39875,6 +40134,7 @@
                   <a:srgbClr val="1B3B6F"/>
                 </a:solidFill>
                 <a:latin typeface="Amiri" pitchFamily="2" charset="-78"/>
+                <a:ea typeface="Amiri" pitchFamily="2" charset="-78"/>
                 <a:cs typeface="Amiri" pitchFamily="2" charset="-78"/>
               </a:rPr>
               <a:t>بِبُطْءٍ</a:t>
@@ -40008,6 +40268,7 @@
                   <a:srgbClr val="D4AF37"/>
                 </a:solidFill>
                 <a:latin typeface="Amiri" pitchFamily="2" charset="-78"/>
+                <a:ea typeface="Amiri" pitchFamily="2" charset="-78"/>
                 <a:cs typeface="Amiri" pitchFamily="2" charset="-78"/>
               </a:rPr>
               <a:t>م</a:t>
@@ -40328,6 +40589,7 @@
                   <a:srgbClr val="8A6D1E"/>
                 </a:solidFill>
                 <a:latin typeface="Amiri" pitchFamily="2" charset="-78"/>
+                <a:ea typeface="Amiri" pitchFamily="2" charset="-78"/>
                 <a:cs typeface="Amiri" pitchFamily="2" charset="-78"/>
               </a:rPr>
               <a:t>فِي الغُرَفِ</a:t>
@@ -41504,6 +41766,7 @@
                   <a:srgbClr val="1B3B6F"/>
                 </a:solidFill>
                 <a:latin typeface="Amiri" pitchFamily="2" charset="-78"/>
+                <a:ea typeface="Amiri" pitchFamily="2" charset="-78"/>
                 <a:cs typeface="Amiri" pitchFamily="2" charset="-78"/>
               </a:rPr>
               <a:t>دَوْرُكَ!</a:t>
@@ -41580,6 +41843,7 @@
                   <a:srgbClr val="1B3B6F"/>
                 </a:solidFill>
                 <a:latin typeface="Amiri" pitchFamily="2" charset="-78"/>
+                <a:ea typeface="Amiri" pitchFamily="2" charset="-78"/>
                 <a:cs typeface="Amiri" pitchFamily="2" charset="-78"/>
               </a:rPr>
               <a:t>أَحْسَنْتَ! / أَحْسَنْتِ!</a:t>
@@ -41656,6 +41920,7 @@
                   <a:srgbClr val="1B3B6F"/>
                 </a:solidFill>
                 <a:latin typeface="Amiri" pitchFamily="2" charset="-78"/>
+                <a:ea typeface="Amiri" pitchFamily="2" charset="-78"/>
                 <a:cs typeface="Amiri" pitchFamily="2" charset="-78"/>
               </a:rPr>
               <a:t>تَكَلَّمْ أَكْثَرَ، مِنْ فَضْلِكَ</a:t>
@@ -41732,6 +41997,7 @@
                   <a:srgbClr val="1B3B6F"/>
                 </a:solidFill>
                 <a:latin typeface="Amiri" pitchFamily="2" charset="-78"/>
+                <a:ea typeface="Amiri" pitchFamily="2" charset="-78"/>
                 <a:cs typeface="Amiri" pitchFamily="2" charset="-78"/>
               </a:rPr>
               <a:t>لِمَاذَا؟</a:t>
@@ -41903,6 +42169,7 @@
                   <a:srgbClr val="D4AF37"/>
                 </a:solidFill>
                 <a:latin typeface="Amiri" pitchFamily="2" charset="-78"/>
+                <a:ea typeface="Amiri" pitchFamily="2" charset="-78"/>
                 <a:cs typeface="Amiri" pitchFamily="2" charset="-78"/>
               </a:rPr>
               <a:t>م</a:t>
@@ -42223,6 +42490,7 @@
                   <a:srgbClr val="8A6D1E"/>
                 </a:solidFill>
                 <a:latin typeface="Amiri" pitchFamily="2" charset="-78"/>
+                <a:ea typeface="Amiri" pitchFamily="2" charset="-78"/>
                 <a:cs typeface="Amiri" pitchFamily="2" charset="-78"/>
               </a:rPr>
               <a:t>فِي مَدْرَسَةِ اللُّغَاتِ</a:t>
@@ -42503,6 +42771,7 @@
                   <a:srgbClr val="1B3B6F"/>
                 </a:solidFill>
                 <a:latin typeface="Amiri" pitchFamily="2" charset="-78"/>
+                <a:ea typeface="Amiri" pitchFamily="2" charset="-78"/>
                 <a:cs typeface="Amiri" pitchFamily="2" charset="-78"/>
               </a:rPr>
               <a:t>أَتَعَلَّمُ …</a:t>
@@ -42579,6 +42848,7 @@
                   <a:srgbClr val="1B3B6F"/>
                 </a:solidFill>
                 <a:latin typeface="Amiri" pitchFamily="2" charset="-78"/>
+                <a:ea typeface="Amiri" pitchFamily="2" charset="-78"/>
                 <a:cs typeface="Amiri" pitchFamily="2" charset="-78"/>
               </a:rPr>
               <a:t>أَهْلًا! أَيَّ لُغَةٍ تَتَعَلَّمُ؟</a:t>
@@ -42747,6 +43017,7 @@
                   <a:srgbClr val="1B3B6F"/>
                 </a:solidFill>
                 <a:latin typeface="Amiri" pitchFamily="2" charset="-78"/>
+                <a:ea typeface="Amiri" pitchFamily="2" charset="-78"/>
                 <a:cs typeface="Amiri" pitchFamily="2" charset="-78"/>
               </a:rPr>
               <a:t>مُنْذُ … سَنَوَاتٍ</a:t>
@@ -42823,6 +43094,7 @@
                   <a:srgbClr val="1B3B6F"/>
                 </a:solidFill>
                 <a:latin typeface="Amiri" pitchFamily="2" charset="-78"/>
+                <a:ea typeface="Amiri" pitchFamily="2" charset="-78"/>
                 <a:cs typeface="Amiri" pitchFamily="2" charset="-78"/>
               </a:rPr>
               <a:t>مُنْذُ مَتَى؟</a:t>
@@ -42991,6 +43263,7 @@
                   <a:srgbClr val="1B3B6F"/>
                 </a:solidFill>
                 <a:latin typeface="Amiri" pitchFamily="2" charset="-78"/>
+                <a:ea typeface="Amiri" pitchFamily="2" charset="-78"/>
                 <a:cs typeface="Amiri" pitchFamily="2" charset="-78"/>
               </a:rPr>
               <a:t>لِأَنَّ …</a:t>
@@ -43067,6 +43340,7 @@
                   <a:srgbClr val="1B3B6F"/>
                 </a:solidFill>
                 <a:latin typeface="Amiri" pitchFamily="2" charset="-78"/>
+                <a:ea typeface="Amiri" pitchFamily="2" charset="-78"/>
                 <a:cs typeface="Amiri" pitchFamily="2" charset="-78"/>
               </a:rPr>
               <a:t>وَلِمَاذَا تَتَعَلَّمُهَا؟</a:t>
@@ -43235,6 +43509,7 @@
                   <a:srgbClr val="1B3B6F"/>
                 </a:solidFill>
                 <a:latin typeface="Amiri" pitchFamily="2" charset="-78"/>
+                <a:ea typeface="Amiri" pitchFamily="2" charset="-78"/>
                 <a:cs typeface="Amiri" pitchFamily="2" charset="-78"/>
               </a:rPr>
               <a:t>مَتَى …؟</a:t>
@@ -43311,6 +43586,7 @@
                   <a:srgbClr val="1B3B6F"/>
                 </a:solidFill>
                 <a:latin typeface="Amiri" pitchFamily="2" charset="-78"/>
+                <a:ea typeface="Amiri" pitchFamily="2" charset="-78"/>
                 <a:cs typeface="Amiri" pitchFamily="2" charset="-78"/>
               </a:rPr>
               <a:t>عِنْدَنَا صُفُوفٌ لِلْمُحَادَثَةِ.</a:t>
@@ -43479,6 +43755,7 @@
                   <a:srgbClr val="1B3B6F"/>
                 </a:solidFill>
                 <a:latin typeface="Amiri" pitchFamily="2" charset="-78"/>
+                <a:ea typeface="Amiri" pitchFamily="2" charset="-78"/>
                 <a:cs typeface="Amiri" pitchFamily="2" charset="-78"/>
               </a:rPr>
               <a:t>أَسْتَخْدِمُ … / أُشَاهِدُ …</a:t>
@@ -43555,6 +43832,7 @@
                   <a:srgbClr val="1B3B6F"/>
                 </a:solidFill>
                 <a:latin typeface="Amiri" pitchFamily="2" charset="-78"/>
+                <a:ea typeface="Amiri" pitchFamily="2" charset="-78"/>
                 <a:cs typeface="Amiri" pitchFamily="2" charset="-78"/>
               </a:rPr>
               <a:t>يَوْمَ الأَرْبِعَاءِ. كَيْفَ تَتَدَرَّبُ فِي البَيْتِ؟</a:t>
@@ -43829,6 +44107,7 @@
                   <a:srgbClr val="D4AF37"/>
                 </a:solidFill>
                 <a:latin typeface="Amiri" pitchFamily="2" charset="-78"/>
+                <a:ea typeface="Amiri" pitchFamily="2" charset="-78"/>
                 <a:cs typeface="Amiri" pitchFamily="2" charset="-78"/>
               </a:rPr>
               <a:t>م</a:t>
@@ -44149,6 +44428,7 @@
                   <a:srgbClr val="8A6D1E"/>
                 </a:solidFill>
                 <a:latin typeface="Amiri" pitchFamily="2" charset="-78"/>
+                <a:ea typeface="Amiri" pitchFamily="2" charset="-78"/>
                 <a:cs typeface="Amiri" pitchFamily="2" charset="-78"/>
               </a:rPr>
               <a:t>مُسَاعَدَةُ سَائِحٍ</a:t>
@@ -44429,6 +44709,7 @@
                   <a:srgbClr val="1B3B6F"/>
                 </a:solidFill>
                 <a:latin typeface="Amiri" pitchFamily="2" charset="-78"/>
+                <a:ea typeface="Amiri" pitchFamily="2" charset="-78"/>
                 <a:cs typeface="Amiri" pitchFamily="2" charset="-78"/>
               </a:rPr>
               <a:t>نَعَمْ، أَتَكَلَّمُ … كَيْفَ …؟</a:t>
@@ -44505,6 +44786,7 @@
                   <a:srgbClr val="1B3B6F"/>
                 </a:solidFill>
                 <a:latin typeface="Amiri" pitchFamily="2" charset="-78"/>
+                <a:ea typeface="Amiri" pitchFamily="2" charset="-78"/>
                 <a:cs typeface="Amiri" pitchFamily="2" charset="-78"/>
               </a:rPr>
               <a:t>عَفْوًا، هَلْ تَتَكَلَّمُ العَرَبِيَّةَ؟</a:t>
@@ -44673,6 +44955,7 @@
                   <a:srgbClr val="1B3B6F"/>
                 </a:solidFill>
                 <a:latin typeface="Amiri" pitchFamily="2" charset="-78"/>
+                <a:ea typeface="Amiri" pitchFamily="2" charset="-78"/>
                 <a:cs typeface="Amiri" pitchFamily="2" charset="-78"/>
               </a:rPr>
               <a:t>القِطَارُ الَّذِي … يَنْطَلِقُ مِنْ …</a:t>
@@ -44749,6 +45032,7 @@
                   <a:srgbClr val="1B3B6F"/>
                 </a:solidFill>
                 <a:latin typeface="Amiri" pitchFamily="2" charset="-78"/>
+                <a:ea typeface="Amiri" pitchFamily="2" charset="-78"/>
                 <a:cs typeface="Amiri" pitchFamily="2" charset="-78"/>
               </a:rPr>
               <a:t>أُرِيدُ القِطَارَ إِلَى لَنْدَنَ، لٰكِنِّي لَا أَفْهَمُ اللَّوْحَةَ.</a:t>
@@ -44917,6 +45201,7 @@
                   <a:srgbClr val="1B3B6F"/>
                 </a:solidFill>
                 <a:latin typeface="Amiri" pitchFamily="2" charset="-78"/>
+                <a:ea typeface="Amiri" pitchFamily="2" charset="-78"/>
                 <a:cs typeface="Amiri" pitchFamily="2" charset="-78"/>
               </a:rPr>
               <a:t>أَتَكَلَّمُهَا فِي البَيْتِ، وَأَدْرُسُ … فِي …</a:t>
@@ -44993,6 +45278,7 @@
                   <a:srgbClr val="1B3B6F"/>
                 </a:solidFill>
                 <a:latin typeface="Amiri" pitchFamily="2" charset="-78"/>
+                <a:ea typeface="Amiri" pitchFamily="2" charset="-78"/>
                 <a:cs typeface="Amiri" pitchFamily="2" charset="-78"/>
               </a:rPr>
               <a:t>شُكْرًا! أَيْنَ تَعَلَّمْتَ العَرَبِيَّةَ؟</a:t>
@@ -45096,6 +45382,7 @@
                   <a:srgbClr val="1B3B6F"/>
                 </a:solidFill>
                 <a:latin typeface="Amiri" pitchFamily="2" charset="-78"/>
+                <a:ea typeface="Amiri" pitchFamily="2" charset="-78"/>
                 <a:cs typeface="Amiri" pitchFamily="2" charset="-78"/>
               </a:rPr>
               <a:t>مِنْ أَيِّ …؟</a:t>
@@ -45172,6 +45459,7 @@
                   <a:srgbClr val="1B3B6F"/>
                 </a:solidFill>
                 <a:latin typeface="Amiri" pitchFamily="2" charset="-78"/>
+                <a:ea typeface="Amiri" pitchFamily="2" charset="-78"/>
                 <a:cs typeface="Amiri" pitchFamily="2" charset="-78"/>
               </a:rPr>
               <a:t>لَهْجَتُكَ مُخْتَلِفَةٌ عَنْ لَهْجَتِي!</a:t>
@@ -45275,6 +45563,7 @@
                   <a:srgbClr val="1B3B6F"/>
                 </a:solidFill>
                 <a:latin typeface="Amiri" pitchFamily="2" charset="-78"/>
+                <a:ea typeface="Amiri" pitchFamily="2" charset="-78"/>
                 <a:cs typeface="Amiri" pitchFamily="2" charset="-78"/>
               </a:rPr>
               <a:t>القِرَاءَةُ … أَمَّا الكِتَابَةُ فَصَعْبَةٌ …</a:t>
@@ -45351,6 +45640,7 @@
                   <a:srgbClr val="1B3B6F"/>
                 </a:solidFill>
                 <a:latin typeface="Amiri" pitchFamily="2" charset="-78"/>
+                <a:ea typeface="Amiri" pitchFamily="2" charset="-78"/>
                 <a:cs typeface="Amiri" pitchFamily="2" charset="-78"/>
               </a:rPr>
               <a:t>مِنَ العِرَاقِ. هَلِ العَرَبِيَّةُ صَعْبَةٌ عَلَيْكَ؟</a:t>
@@ -45525,13 +45815,9 @@
     <a:fontScheme name="Office">
       <a:majorFont>
         <a:latin typeface="Calibri Light" panose="020F0302020204030204"/>
-        <a:ea typeface=""/>
-        <a:cs typeface=""/>
-        <a:font script="Jpan" typeface="游ゴシック Light"/>
-        <a:font script="Hang" typeface="맑은 고딕"/>
-        <a:font script="Hans" typeface="等线 Light"/>
-        <a:font script="Hant" typeface="新細明體"/>
-        <a:font script="Arab" typeface="Times New Roman"/>
+        <a:ea typeface="Amiri" pitchFamily="2" charset="-78"/>
+        <a:cs typeface="Amiri" pitchFamily="2" charset="-78"/>
+        <a:font script="Arab" typeface="Amiri"/>
         <a:font script="Hebr" typeface="Times New Roman"/>
         <a:font script="Thai" typeface="Angsana New"/>
         <a:font script="Ethi" typeface="Nyala"/>
@@ -45577,13 +45863,9 @@
       </a:majorFont>
       <a:minorFont>
         <a:latin typeface="Calibri" panose="020F0502020204030204"/>
-        <a:ea typeface=""/>
-        <a:cs typeface=""/>
-        <a:font script="Jpan" typeface="游ゴシック"/>
-        <a:font script="Hang" typeface="맑은 고딕"/>
-        <a:font script="Hans" typeface="等线"/>
-        <a:font script="Hant" typeface="新細明體"/>
-        <a:font script="Arab" typeface="Arial"/>
+        <a:ea typeface="Amiri" pitchFamily="2" charset="-78"/>
+        <a:cs typeface="Amiri" pitchFamily="2" charset="-78"/>
+        <a:font script="Arab" typeface="Amiri"/>
         <a:font script="Hebr" typeface="Arial"/>
         <a:font script="Thai" typeface="Cordia New"/>
         <a:font script="Ethi" typeface="Nyala"/>
